--- a/docs/tutoriais/Tutorial-MB.pptx
+++ b/docs/tutoriais/Tutorial-MB.pptx
@@ -14,9 +14,11 @@
     <p:sldId id="262" r:id="rId8"/>
     <p:sldId id="263" r:id="rId9"/>
     <p:sldId id="264" r:id="rId10"/>
+    <p:sldId id="265" r:id="rId11"/>
+    <p:sldId id="266" r:id="rId12"/>
   </p:sldIdLst>
   <p:notesMasterIdLst>
-    <p:notesMasterId r:id="rId11"/>
+    <p:notesMasterId r:id="rId13"/>
   </p:notesMasterIdLst>
   <p:sldSz cx="12192000" cy="6858000"/>
   <p:notesSz cx="6858000" cy="12192000"/>
@@ -534,6 +536,182 @@
             <a:fld id="{F7021451-1387-4CA6-816F-3879F97B5CBC}" type="slidenum">
               <a:rPr lang="en-US"/>
               <a:t>1</a:t>
+            </a:fld>
+            <a:endParaRPr lang="en-US"/>
+          </a:p>
+        </p:txBody>
+      </p:sp>
+    </p:spTree>
+    <p:extLst>
+      <p:ext uri="{BB962C8B-B14F-4D97-AF65-F5344CB8AC3E}">
+        <p14:creationId xmlns:p14="http://schemas.microsoft.com/office/powerpoint/2010/main" val="1024086991"/>
+      </p:ext>
+    </p:extLst>
+  </p:cSld>
+  <p:clrMapOvr>
+    <a:masterClrMapping/>
+  </p:clrMapOvr>
+</p:notes>
+</file>
+
+<file path=ppt/notesSlides/notesSlide10.xml><?xml version="1.0" encoding="utf-8"?>
+<p:notes xmlns:a="http://schemas.openxmlformats.org/drawingml/2006/main" xmlns:r="http://schemas.openxmlformats.org/officeDocument/2006/relationships" xmlns:p="http://schemas.openxmlformats.org/presentationml/2006/main">
+  <p:cSld>
+    <p:spTree>
+      <p:nvGrpSpPr>
+        <p:cNvPr id="1" name=""/>
+        <p:cNvGrpSpPr/>
+        <p:nvPr/>
+      </p:nvGrpSpPr>
+      <p:grpSpPr>
+        <a:xfrm>
+          <a:off x="0" y="0"/>
+          <a:ext cx="0" cy="0"/>
+          <a:chOff x="0" y="0"/>
+          <a:chExt cx="0" cy="0"/>
+        </a:xfrm>
+      </p:grpSpPr>
+      <p:sp>
+        <p:nvSpPr>
+          <p:cNvPr id="2" name="Slide Image Placeholder 1"/>
+          <p:cNvSpPr>
+            <a:spLocks noGrp="1" noRot="1" noChangeAspect="1"/>
+          </p:cNvSpPr>
+          <p:nvPr>
+            <p:ph type="sldImg"/>
+          </p:nvPr>
+        </p:nvSpPr>
+        <p:spPr/>
+      </p:sp>
+      <p:sp>
+        <p:nvSpPr>
+          <p:cNvPr id="3" name="Notes Placeholder 2"/>
+          <p:cNvSpPr>
+            <a:spLocks noGrp="1"/>
+          </p:cNvSpPr>
+          <p:nvPr>
+            <p:ph type="body" idx="1"/>
+          </p:nvPr>
+        </p:nvSpPr>
+        <p:spPr/>
+        <p:txBody>
+          <a:bodyPr/>
+          <a:lstStyle/>
+          <a:p>
+            <a:r>
+              <a:rPr lang="en-US" dirty="0"/>
+              <a:t/>
+            </a:r>
+            <a:endParaRPr lang="en-US" dirty="0"/>
+          </a:p>
+        </p:txBody>
+      </p:sp>
+      <p:sp>
+        <p:nvSpPr>
+          <p:cNvPr id="4" name="Slide Number Placeholder 3"/>
+          <p:cNvSpPr>
+            <a:spLocks noGrp="1"/>
+          </p:cNvSpPr>
+          <p:nvPr>
+            <p:ph type="sldNum" sz="quarter" idx="10"/>
+          </p:nvPr>
+        </p:nvSpPr>
+        <p:spPr/>
+        <p:txBody>
+          <a:bodyPr/>
+          <a:lstStyle/>
+          <a:p>
+            <a:fld id="{F7021451-1387-4CA6-816F-3879F97B5CBC}" type="slidenum">
+              <a:rPr lang="en-US"/>
+              <a:t>10</a:t>
+            </a:fld>
+            <a:endParaRPr lang="en-US"/>
+          </a:p>
+        </p:txBody>
+      </p:sp>
+    </p:spTree>
+    <p:extLst>
+      <p:ext uri="{BB962C8B-B14F-4D97-AF65-F5344CB8AC3E}">
+        <p14:creationId xmlns:p14="http://schemas.microsoft.com/office/powerpoint/2010/main" val="1024086991"/>
+      </p:ext>
+    </p:extLst>
+  </p:cSld>
+  <p:clrMapOvr>
+    <a:masterClrMapping/>
+  </p:clrMapOvr>
+</p:notes>
+</file>
+
+<file path=ppt/notesSlides/notesSlide11.xml><?xml version="1.0" encoding="utf-8"?>
+<p:notes xmlns:a="http://schemas.openxmlformats.org/drawingml/2006/main" xmlns:r="http://schemas.openxmlformats.org/officeDocument/2006/relationships" xmlns:p="http://schemas.openxmlformats.org/presentationml/2006/main">
+  <p:cSld>
+    <p:spTree>
+      <p:nvGrpSpPr>
+        <p:cNvPr id="1" name=""/>
+        <p:cNvGrpSpPr/>
+        <p:nvPr/>
+      </p:nvGrpSpPr>
+      <p:grpSpPr>
+        <a:xfrm>
+          <a:off x="0" y="0"/>
+          <a:ext cx="0" cy="0"/>
+          <a:chOff x="0" y="0"/>
+          <a:chExt cx="0" cy="0"/>
+        </a:xfrm>
+      </p:grpSpPr>
+      <p:sp>
+        <p:nvSpPr>
+          <p:cNvPr id="2" name="Slide Image Placeholder 1"/>
+          <p:cNvSpPr>
+            <a:spLocks noGrp="1" noRot="1" noChangeAspect="1"/>
+          </p:cNvSpPr>
+          <p:nvPr>
+            <p:ph type="sldImg"/>
+          </p:nvPr>
+        </p:nvSpPr>
+        <p:spPr/>
+      </p:sp>
+      <p:sp>
+        <p:nvSpPr>
+          <p:cNvPr id="3" name="Notes Placeholder 2"/>
+          <p:cNvSpPr>
+            <a:spLocks noGrp="1"/>
+          </p:cNvSpPr>
+          <p:nvPr>
+            <p:ph type="body" idx="1"/>
+          </p:nvPr>
+        </p:nvSpPr>
+        <p:spPr/>
+        <p:txBody>
+          <a:bodyPr/>
+          <a:lstStyle/>
+          <a:p>
+            <a:r>
+              <a:rPr lang="en-US" dirty="0"/>
+              <a:t/>
+            </a:r>
+            <a:endParaRPr lang="en-US" dirty="0"/>
+          </a:p>
+        </p:txBody>
+      </p:sp>
+      <p:sp>
+        <p:nvSpPr>
+          <p:cNvPr id="4" name="Slide Number Placeholder 3"/>
+          <p:cNvSpPr>
+            <a:spLocks noGrp="1"/>
+          </p:cNvSpPr>
+          <p:nvPr>
+            <p:ph type="sldNum" sz="quarter" idx="10"/>
+          </p:nvPr>
+        </p:nvSpPr>
+        <p:spPr/>
+        <p:txBody>
+          <a:bodyPr/>
+          <a:lstStyle/>
+          <a:p>
+            <a:fld id="{F7021451-1387-4CA6-816F-3879F97B5CBC}" type="slidenum">
+              <a:rPr lang="en-US"/>
+              <a:t>11</a:t>
             </a:fld>
             <a:endParaRPr lang="en-US"/>
           </a:p>
@@ -1762,7 +1940,7 @@
                 <a:ea typeface="Calibri" pitchFamily="34" charset="-122"/>
                 <a:cs typeface="Calibri" pitchFamily="34" charset="-120"/>
               </a:rPr>
-              <a:t>Como baixar os materiais completos (na ordem certa de inserção),</a:t>
+              <a:t>Como disponibilizar os vídeos para a análise do formador, tratar os apontamentos,</a:t>
             </a:r>
             <a:endParaRPr lang="en-US" sz="1700" dirty="0"/>
           </a:p>
@@ -1782,7 +1960,7 @@
                 <a:ea typeface="Calibri" pitchFamily="34" charset="-122"/>
                 <a:cs typeface="Calibri" pitchFamily="34" charset="-120"/>
               </a:rPr>
-              <a:t>registrar o avanço e publicar os cursos na Plataforma AutoriaSCS.</a:t>
+              <a:t>baixar os materiais na ordem e publicar os cursos.</a:t>
             </a:r>
             <a:endParaRPr lang="en-US" sz="1700" dirty="0"/>
           </a:p>
@@ -1797,7 +1975,7 @@
         <p:spPr>
           <a:xfrm>
             <a:off x="822960" y="5349240"/>
-            <a:ext cx="4114800" cy="457200"/>
+            <a:ext cx="4480560" cy="457200"/>
           </a:xfrm>
           <a:prstGeom prst="roundRect">
             <a:avLst>
@@ -1824,7 +2002,7 @@
         <p:spPr>
           <a:xfrm>
             <a:off x="822960" y="5349240"/>
-            <a:ext cx="4114800" cy="457200"/>
+            <a:ext cx="4480560" cy="457200"/>
           </a:xfrm>
           <a:prstGeom prst="rect">
             <a:avLst/>
@@ -1904,6 +2082,1191 @@
               <a:t>cecapescs.com.br/autoriascs/scrum  •  ti.cecape@scseduca.com.br</a:t>
             </a:r>
             <a:endParaRPr lang="en-US" sz="1100" dirty="0"/>
+          </a:p>
+        </p:txBody>
+      </p:sp>
+    </p:spTree>
+  </p:cSld>
+  <p:clrMapOvr>
+    <a:masterClrMapping/>
+  </p:clrMapOvr>
+</p:sld>
+</file>
+
+<file path=ppt/slides/slide10.xml><?xml version="1.0" encoding="utf-8"?>
+<p:sld xmlns:a="http://schemas.openxmlformats.org/drawingml/2006/main" xmlns:r="http://schemas.openxmlformats.org/officeDocument/2006/relationships" xmlns:p="http://schemas.openxmlformats.org/presentationml/2006/main">
+  <p:cSld name="Slide 10">
+    <p:bg>
+      <p:bgPr>
+        <a:solidFill>
+          <a:srgbClr val="0A1626"/>
+        </a:solidFill>
+      </p:bgPr>
+    </p:bg>
+    <p:spTree>
+      <p:nvGrpSpPr>
+        <p:cNvPr id="1" name=""/>
+        <p:cNvGrpSpPr/>
+        <p:nvPr/>
+      </p:nvGrpSpPr>
+      <p:grpSpPr>
+        <a:xfrm>
+          <a:off x="0" y="0"/>
+          <a:ext cx="0" cy="0"/>
+          <a:chOff x="0" y="0"/>
+          <a:chExt cx="0" cy="0"/>
+        </a:xfrm>
+      </p:grpSpPr>
+      <p:sp>
+        <p:nvSpPr>
+          <p:cNvPr id="2" name="Text 0"/>
+          <p:cNvSpPr/>
+          <p:nvPr/>
+        </p:nvSpPr>
+        <p:spPr>
+          <a:xfrm>
+            <a:off x="548640" y="320040"/>
+            <a:ext cx="5486400" cy="292608"/>
+          </a:xfrm>
+          <a:prstGeom prst="rect">
+            <a:avLst/>
+          </a:prstGeom>
+          <a:noFill/>
+          <a:ln/>
+        </p:spPr>
+        <p:txBody>
+          <a:bodyPr wrap="square" lIns="0" tIns="0" rIns="0" bIns="0" rtlCol="0" anchor="ctr"/>
+          <a:lstStyle/>
+          <a:p>
+            <a:pPr indent="0" marL="0">
+              <a:buNone/>
+            </a:pPr>
+            <a:r>
+              <a:rPr lang="en-US" sz="1200" b="1" spc="300" kern="0" dirty="0">
+                <a:solidFill>
+                  <a:srgbClr val="22D3EE"/>
+                </a:solidFill>
+                <a:latin typeface="Calibri" pitchFamily="34" charset="0"/>
+                <a:ea typeface="Calibri" pitchFamily="34" charset="-122"/>
+                <a:cs typeface="Calibri" pitchFamily="34" charset="-120"/>
+              </a:rPr>
+              <a:t>BOM SABER</a:t>
+            </a:r>
+            <a:endParaRPr lang="en-US" sz="1200" dirty="0"/>
+          </a:p>
+        </p:txBody>
+      </p:sp>
+      <p:sp>
+        <p:nvSpPr>
+          <p:cNvPr id="3" name="Text 1"/>
+          <p:cNvSpPr/>
+          <p:nvPr/>
+        </p:nvSpPr>
+        <p:spPr>
+          <a:xfrm>
+            <a:off x="548640" y="566928"/>
+            <a:ext cx="11091672" cy="685800"/>
+          </a:xfrm>
+          <a:prstGeom prst="rect">
+            <a:avLst/>
+          </a:prstGeom>
+          <a:noFill/>
+          <a:ln/>
+        </p:spPr>
+        <p:txBody>
+          <a:bodyPr wrap="square" lIns="0" tIns="0" rIns="0" bIns="0" rtlCol="0" anchor="ctr"/>
+          <a:lstStyle/>
+          <a:p>
+            <a:pPr indent="0" marL="0">
+              <a:buNone/>
+            </a:pPr>
+            <a:r>
+              <a:rPr lang="en-US" sz="3000" b="1" dirty="0">
+                <a:solidFill>
+                  <a:srgbClr val="E8EEF7"/>
+                </a:solidFill>
+                <a:latin typeface="Calibri" pitchFamily="34" charset="0"/>
+                <a:ea typeface="Calibri" pitchFamily="34" charset="-122"/>
+                <a:cs typeface="Calibri" pitchFamily="34" charset="-120"/>
+              </a:rPr>
+              <a:t>8. O que a conta MB não faz</a:t>
+            </a:r>
+            <a:endParaRPr lang="en-US" sz="3000" dirty="0"/>
+          </a:p>
+        </p:txBody>
+      </p:sp>
+      <p:sp>
+        <p:nvSpPr>
+          <p:cNvPr id="4" name="Shape 2"/>
+          <p:cNvSpPr/>
+          <p:nvPr/>
+        </p:nvSpPr>
+        <p:spPr>
+          <a:xfrm>
+            <a:off x="640080" y="1783080"/>
+            <a:ext cx="3566160" cy="1691640"/>
+          </a:xfrm>
+          <a:prstGeom prst="roundRect">
+            <a:avLst>
+              <a:gd name="adj" fmla="val 4865"/>
+            </a:avLst>
+          </a:prstGeom>
+          <a:solidFill>
+            <a:srgbClr val="10233F"/>
+          </a:solidFill>
+          <a:ln w="12700">
+            <a:solidFill>
+              <a:srgbClr val="1D3A5F"/>
+            </a:solidFill>
+            <a:prstDash val="solid"/>
+          </a:ln>
+        </p:spPr>
+      </p:sp>
+      <p:sp>
+        <p:nvSpPr>
+          <p:cNvPr id="5" name="Text 3"/>
+          <p:cNvSpPr/>
+          <p:nvPr/>
+        </p:nvSpPr>
+        <p:spPr>
+          <a:xfrm>
+            <a:off x="841248" y="1929384"/>
+            <a:ext cx="3163824" cy="329184"/>
+          </a:xfrm>
+          <a:prstGeom prst="rect">
+            <a:avLst/>
+          </a:prstGeom>
+          <a:noFill/>
+          <a:ln/>
+        </p:spPr>
+        <p:txBody>
+          <a:bodyPr wrap="square" lIns="0" tIns="0" rIns="0" bIns="0" rtlCol="0" anchor="ctr"/>
+          <a:lstStyle/>
+          <a:p>
+            <a:pPr indent="0" marL="0">
+              <a:buNone/>
+            </a:pPr>
+            <a:r>
+              <a:rPr lang="en-US" sz="1400" b="1" dirty="0">
+                <a:solidFill>
+                  <a:srgbClr val="22D3EE"/>
+                </a:solidFill>
+                <a:latin typeface="Calibri" pitchFamily="34" charset="0"/>
+                <a:ea typeface="Calibri" pitchFamily="34" charset="-122"/>
+                <a:cs typeface="Calibri" pitchFamily="34" charset="-120"/>
+              </a:rPr>
+              <a:t>Não envia materiais do curso</a:t>
+            </a:r>
+            <a:endParaRPr lang="en-US" sz="1400" dirty="0"/>
+          </a:p>
+        </p:txBody>
+      </p:sp>
+      <p:sp>
+        <p:nvSpPr>
+          <p:cNvPr id="6" name="Text 4"/>
+          <p:cNvSpPr/>
+          <p:nvPr/>
+        </p:nvSpPr>
+        <p:spPr>
+          <a:xfrm>
+            <a:off x="841248" y="2258568"/>
+            <a:ext cx="3163824" cy="1088136"/>
+          </a:xfrm>
+          <a:prstGeom prst="rect">
+            <a:avLst/>
+          </a:prstGeom>
+          <a:noFill/>
+          <a:ln/>
+        </p:spPr>
+        <p:txBody>
+          <a:bodyPr wrap="square" lIns="0" tIns="0" rIns="0" bIns="0" rtlCol="0" anchor="t"/>
+          <a:lstStyle/>
+          <a:p>
+            <a:pPr indent="0" marL="0">
+              <a:lnSpc>
+                <a:spcPct val="112000"/>
+              </a:lnSpc>
+              <a:buNone/>
+            </a:pPr>
+            <a:r>
+              <a:rPr lang="en-US" sz="1300" dirty="0">
+                <a:solidFill>
+                  <a:srgbClr val="E8EEF7"/>
+                </a:solidFill>
+                <a:latin typeface="Calibri" pitchFamily="34" charset="0"/>
+                <a:ea typeface="Calibri" pitchFamily="34" charset="-122"/>
+                <a:cs typeface="Calibri" pitchFamily="34" charset="-120"/>
+              </a:rPr>
+              <a:t>Slides, PDFs e anexos são enviados pelo formador. A MB envia apenas os vídeos.</a:t>
+            </a:r>
+            <a:endParaRPr lang="en-US" sz="1300" dirty="0"/>
+          </a:p>
+        </p:txBody>
+      </p:sp>
+      <p:sp>
+        <p:nvSpPr>
+          <p:cNvPr id="7" name="Shape 5"/>
+          <p:cNvSpPr/>
+          <p:nvPr/>
+        </p:nvSpPr>
+        <p:spPr>
+          <a:xfrm>
+            <a:off x="4389120" y="1783080"/>
+            <a:ext cx="3566160" cy="1691640"/>
+          </a:xfrm>
+          <a:prstGeom prst="roundRect">
+            <a:avLst>
+              <a:gd name="adj" fmla="val 4865"/>
+            </a:avLst>
+          </a:prstGeom>
+          <a:solidFill>
+            <a:srgbClr val="10233F"/>
+          </a:solidFill>
+          <a:ln w="12700">
+            <a:solidFill>
+              <a:srgbClr val="1D3A5F"/>
+            </a:solidFill>
+            <a:prstDash val="solid"/>
+          </a:ln>
+        </p:spPr>
+      </p:sp>
+      <p:sp>
+        <p:nvSpPr>
+          <p:cNvPr id="8" name="Text 6"/>
+          <p:cNvSpPr/>
+          <p:nvPr/>
+        </p:nvSpPr>
+        <p:spPr>
+          <a:xfrm>
+            <a:off x="4590288" y="1929384"/>
+            <a:ext cx="3163824" cy="329184"/>
+          </a:xfrm>
+          <a:prstGeom prst="rect">
+            <a:avLst/>
+          </a:prstGeom>
+          <a:noFill/>
+          <a:ln/>
+        </p:spPr>
+        <p:txBody>
+          <a:bodyPr wrap="square" lIns="0" tIns="0" rIns="0" bIns="0" rtlCol="0" anchor="ctr"/>
+          <a:lstStyle/>
+          <a:p>
+            <a:pPr indent="0" marL="0">
+              <a:buNone/>
+            </a:pPr>
+            <a:r>
+              <a:rPr lang="en-US" sz="1400" b="1" dirty="0">
+                <a:solidFill>
+                  <a:srgbClr val="22D3EE"/>
+                </a:solidFill>
+                <a:latin typeface="Calibri" pitchFamily="34" charset="0"/>
+                <a:ea typeface="Calibri" pitchFamily="34" charset="-122"/>
+                <a:cs typeface="Calibri" pitchFamily="34" charset="-120"/>
+              </a:rPr>
+              <a:t>Não baixa arquivo avulso</a:t>
+            </a:r>
+            <a:endParaRPr lang="en-US" sz="1400" dirty="0"/>
+          </a:p>
+        </p:txBody>
+      </p:sp>
+      <p:sp>
+        <p:nvSpPr>
+          <p:cNvPr id="9" name="Text 7"/>
+          <p:cNvSpPr/>
+          <p:nvPr/>
+        </p:nvSpPr>
+        <p:spPr>
+          <a:xfrm>
+            <a:off x="4590288" y="2258568"/>
+            <a:ext cx="3163824" cy="1088136"/>
+          </a:xfrm>
+          <a:prstGeom prst="rect">
+            <a:avLst/>
+          </a:prstGeom>
+          <a:noFill/>
+          <a:ln/>
+        </p:spPr>
+        <p:txBody>
+          <a:bodyPr wrap="square" lIns="0" tIns="0" rIns="0" bIns="0" rtlCol="0" anchor="t"/>
+          <a:lstStyle/>
+          <a:p>
+            <a:pPr indent="0" marL="0">
+              <a:lnSpc>
+                <a:spcPct val="112000"/>
+              </a:lnSpc>
+              <a:buNone/>
+            </a:pPr>
+            <a:r>
+              <a:rPr lang="en-US" sz="1300" dirty="0">
+                <a:solidFill>
+                  <a:srgbClr val="E8EEF7"/>
+                </a:solidFill>
+                <a:latin typeface="Calibri" pitchFamily="34" charset="0"/>
+                <a:ea typeface="Calibri" pitchFamily="34" charset="-122"/>
+                <a:cs typeface="Calibri" pitchFamily="34" charset="-120"/>
+              </a:rPr>
+              <a:t>O material desce sempre completo, pelo ZIP — é o que garante a ordem.</a:t>
+            </a:r>
+            <a:endParaRPr lang="en-US" sz="1300" dirty="0"/>
+          </a:p>
+        </p:txBody>
+      </p:sp>
+      <p:sp>
+        <p:nvSpPr>
+          <p:cNvPr id="10" name="Shape 8"/>
+          <p:cNvSpPr/>
+          <p:nvPr/>
+        </p:nvSpPr>
+        <p:spPr>
+          <a:xfrm>
+            <a:off x="8138160" y="1783080"/>
+            <a:ext cx="3474720" cy="1691640"/>
+          </a:xfrm>
+          <a:prstGeom prst="roundRect">
+            <a:avLst>
+              <a:gd name="adj" fmla="val 4865"/>
+            </a:avLst>
+          </a:prstGeom>
+          <a:solidFill>
+            <a:srgbClr val="10233F"/>
+          </a:solidFill>
+          <a:ln w="12700">
+            <a:solidFill>
+              <a:srgbClr val="1D3A5F"/>
+            </a:solidFill>
+            <a:prstDash val="solid"/>
+          </a:ln>
+        </p:spPr>
+      </p:sp>
+      <p:sp>
+        <p:nvSpPr>
+          <p:cNvPr id="11" name="Text 9"/>
+          <p:cNvSpPr/>
+          <p:nvPr/>
+        </p:nvSpPr>
+        <p:spPr>
+          <a:xfrm>
+            <a:off x="8339328" y="1929384"/>
+            <a:ext cx="3072384" cy="329184"/>
+          </a:xfrm>
+          <a:prstGeom prst="rect">
+            <a:avLst/>
+          </a:prstGeom>
+          <a:noFill/>
+          <a:ln/>
+        </p:spPr>
+        <p:txBody>
+          <a:bodyPr wrap="square" lIns="0" tIns="0" rIns="0" bIns="0" rtlCol="0" anchor="ctr"/>
+          <a:lstStyle/>
+          <a:p>
+            <a:pPr indent="0" marL="0">
+              <a:buNone/>
+            </a:pPr>
+            <a:r>
+              <a:rPr lang="en-US" sz="1400" b="1" dirty="0">
+                <a:solidFill>
+                  <a:srgbClr val="22D3EE"/>
+                </a:solidFill>
+                <a:latin typeface="Calibri" pitchFamily="34" charset="0"/>
+                <a:ea typeface="Calibri" pitchFamily="34" charset="-122"/>
+                <a:cs typeface="Calibri" pitchFamily="34" charset="-120"/>
+              </a:rPr>
+              <a:t>Não aprova os vídeos</a:t>
+            </a:r>
+            <a:endParaRPr lang="en-US" sz="1400" dirty="0"/>
+          </a:p>
+        </p:txBody>
+      </p:sp>
+      <p:sp>
+        <p:nvSpPr>
+          <p:cNvPr id="12" name="Text 10"/>
+          <p:cNvSpPr/>
+          <p:nvPr/>
+        </p:nvSpPr>
+        <p:spPr>
+          <a:xfrm>
+            <a:off x="8339328" y="2258568"/>
+            <a:ext cx="3072384" cy="1088136"/>
+          </a:xfrm>
+          <a:prstGeom prst="rect">
+            <a:avLst/>
+          </a:prstGeom>
+          <a:noFill/>
+          <a:ln/>
+        </p:spPr>
+        <p:txBody>
+          <a:bodyPr wrap="square" lIns="0" tIns="0" rIns="0" bIns="0" rtlCol="0" anchor="t"/>
+          <a:lstStyle/>
+          <a:p>
+            <a:pPr indent="0" marL="0">
+              <a:lnSpc>
+                <a:spcPct val="112000"/>
+              </a:lnSpc>
+              <a:buNone/>
+            </a:pPr>
+            <a:r>
+              <a:rPr lang="en-US" sz="1300" dirty="0">
+                <a:solidFill>
+                  <a:srgbClr val="E8EEF7"/>
+                </a:solidFill>
+                <a:latin typeface="Calibri" pitchFamily="34" charset="0"/>
+                <a:ea typeface="Calibri" pitchFamily="34" charset="-122"/>
+                <a:cs typeface="Calibri" pitchFamily="34" charset="-120"/>
+              </a:rPr>
+              <a:t>A aprovação final é do(a) formador(a) que analisou o material.</a:t>
+            </a:r>
+            <a:endParaRPr lang="en-US" sz="1300" dirty="0"/>
+          </a:p>
+        </p:txBody>
+      </p:sp>
+      <p:sp>
+        <p:nvSpPr>
+          <p:cNvPr id="13" name="Shape 11"/>
+          <p:cNvSpPr/>
+          <p:nvPr/>
+        </p:nvSpPr>
+        <p:spPr>
+          <a:xfrm>
+            <a:off x="640080" y="3840480"/>
+            <a:ext cx="10972800" cy="2103120"/>
+          </a:xfrm>
+          <a:prstGeom prst="roundRect">
+            <a:avLst>
+              <a:gd name="adj" fmla="val 3913"/>
+            </a:avLst>
+          </a:prstGeom>
+          <a:solidFill>
+            <a:srgbClr val="10233F"/>
+          </a:solidFill>
+          <a:ln w="12700">
+            <a:solidFill>
+              <a:srgbClr val="1D3A5F"/>
+            </a:solidFill>
+            <a:prstDash val="solid"/>
+          </a:ln>
+        </p:spPr>
+      </p:sp>
+      <p:sp>
+        <p:nvSpPr>
+          <p:cNvPr id="14" name="Text 12"/>
+          <p:cNvSpPr/>
+          <p:nvPr/>
+        </p:nvSpPr>
+        <p:spPr>
+          <a:xfrm>
+            <a:off x="841248" y="3986784"/>
+            <a:ext cx="10570464" cy="329184"/>
+          </a:xfrm>
+          <a:prstGeom prst="rect">
+            <a:avLst/>
+          </a:prstGeom>
+          <a:noFill/>
+          <a:ln/>
+        </p:spPr>
+        <p:txBody>
+          <a:bodyPr wrap="square" lIns="0" tIns="0" rIns="0" bIns="0" rtlCol="0" anchor="ctr"/>
+          <a:lstStyle/>
+          <a:p>
+            <a:pPr indent="0" marL="0">
+              <a:buNone/>
+            </a:pPr>
+            <a:r>
+              <a:rPr lang="en-US" sz="1400" b="1" dirty="0">
+                <a:solidFill>
+                  <a:srgbClr val="22D3EE"/>
+                </a:solidFill>
+                <a:latin typeface="Calibri" pitchFamily="34" charset="0"/>
+                <a:ea typeface="Calibri" pitchFamily="34" charset="-122"/>
+                <a:cs typeface="Calibri" pitchFamily="34" charset="-120"/>
+              </a:rPr>
+              <a:t>Por quê?</a:t>
+            </a:r>
+            <a:endParaRPr lang="en-US" sz="1400" dirty="0"/>
+          </a:p>
+        </p:txBody>
+      </p:sp>
+      <p:sp>
+        <p:nvSpPr>
+          <p:cNvPr id="15" name="Text 13"/>
+          <p:cNvSpPr/>
+          <p:nvPr/>
+        </p:nvSpPr>
+        <p:spPr>
+          <a:xfrm>
+            <a:off x="841248" y="4315968"/>
+            <a:ext cx="10570464" cy="1499616"/>
+          </a:xfrm>
+          <a:prstGeom prst="rect">
+            <a:avLst/>
+          </a:prstGeom>
+          <a:noFill/>
+          <a:ln/>
+        </p:spPr>
+        <p:txBody>
+          <a:bodyPr wrap="square" lIns="0" tIns="0" rIns="0" bIns="0" rtlCol="0" anchor="t"/>
+          <a:lstStyle/>
+          <a:p>
+            <a:pPr indent="0" marL="0">
+              <a:lnSpc>
+                <a:spcPct val="112000"/>
+              </a:lnSpc>
+              <a:buNone/>
+            </a:pPr>
+            <a:r>
+              <a:rPr lang="en-US" sz="1300" dirty="0">
+                <a:solidFill>
+                  <a:srgbClr val="E8EEF7"/>
+                </a:solidFill>
+                <a:latin typeface="Calibri" pitchFamily="34" charset="0"/>
+                <a:ea typeface="Calibri" pitchFamily="34" charset="-122"/>
+                <a:cs typeface="Calibri" pitchFamily="34" charset="-120"/>
+              </a:rPr>
+              <a:t>Cada equipe opera só a sua parte do fluxo. Isso evita alterações acidentais e mantém a auditoria limpa: tudo o que a MB faz (envios, downloads e movimentações) fica registrado automaticamente.</a:t>
+            </a:r>
+            <a:endParaRPr lang="en-US" sz="1300" dirty="0"/>
+          </a:p>
+        </p:txBody>
+      </p:sp>
+      <p:sp>
+        <p:nvSpPr>
+          <p:cNvPr id="16" name="Text 14"/>
+          <p:cNvSpPr/>
+          <p:nvPr/>
+        </p:nvSpPr>
+        <p:spPr>
+          <a:xfrm>
+            <a:off x="548640" y="6473952"/>
+            <a:ext cx="7315200" cy="274320"/>
+          </a:xfrm>
+          <a:prstGeom prst="rect">
+            <a:avLst/>
+          </a:prstGeom>
+          <a:noFill/>
+          <a:ln/>
+        </p:spPr>
+        <p:txBody>
+          <a:bodyPr wrap="square" lIns="0" tIns="0" rIns="0" bIns="0" rtlCol="0" anchor="ctr"/>
+          <a:lstStyle/>
+          <a:p>
+            <a:pPr indent="0" marL="0">
+              <a:buNone/>
+            </a:pPr>
+            <a:r>
+              <a:rPr lang="en-US" sz="950" dirty="0">
+                <a:solidFill>
+                  <a:srgbClr val="8BAAC8"/>
+                </a:solidFill>
+                <a:latin typeface="Calibri" pitchFamily="34" charset="0"/>
+                <a:ea typeface="Calibri" pitchFamily="34" charset="-122"/>
+                <a:cs typeface="Calibri" pitchFamily="34" charset="-120"/>
+              </a:rPr>
+              <a:t>AutoriaSCS • Gestão de Cursos  —  Tutorial da MB Estúdios</a:t>
+            </a:r>
+            <a:endParaRPr lang="en-US" sz="950" dirty="0"/>
+          </a:p>
+        </p:txBody>
+      </p:sp>
+      <p:sp>
+        <p:nvSpPr>
+          <p:cNvPr id="17" name="Text 15"/>
+          <p:cNvSpPr/>
+          <p:nvPr/>
+        </p:nvSpPr>
+        <p:spPr>
+          <a:xfrm>
+            <a:off x="10725912" y="6473952"/>
+            <a:ext cx="914400" cy="274320"/>
+          </a:xfrm>
+          <a:prstGeom prst="rect">
+            <a:avLst/>
+          </a:prstGeom>
+          <a:noFill/>
+          <a:ln/>
+        </p:spPr>
+        <p:txBody>
+          <a:bodyPr wrap="square" lIns="0" tIns="0" rIns="0" bIns="0" rtlCol="0" anchor="ctr"/>
+          <a:lstStyle/>
+          <a:p>
+            <a:pPr algn="r" indent="0" marL="0">
+              <a:buNone/>
+            </a:pPr>
+            <a:r>
+              <a:rPr lang="en-US" sz="950" dirty="0">
+                <a:solidFill>
+                  <a:srgbClr val="8BAAC8"/>
+                </a:solidFill>
+                <a:latin typeface="Calibri" pitchFamily="34" charset="0"/>
+                <a:ea typeface="Calibri" pitchFamily="34" charset="-122"/>
+                <a:cs typeface="Calibri" pitchFamily="34" charset="-120"/>
+              </a:rPr>
+              <a:t>10 / 11</a:t>
+            </a:r>
+            <a:endParaRPr lang="en-US" sz="950" dirty="0"/>
+          </a:p>
+        </p:txBody>
+      </p:sp>
+    </p:spTree>
+  </p:cSld>
+  <p:clrMapOvr>
+    <a:masterClrMapping/>
+  </p:clrMapOvr>
+</p:sld>
+</file>
+
+<file path=ppt/slides/slide11.xml><?xml version="1.0" encoding="utf-8"?>
+<p:sld xmlns:a="http://schemas.openxmlformats.org/drawingml/2006/main" xmlns:r="http://schemas.openxmlformats.org/officeDocument/2006/relationships" xmlns:p="http://schemas.openxmlformats.org/presentationml/2006/main">
+  <p:cSld name="Slide 11">
+    <p:bg>
+      <p:bgPr>
+        <a:solidFill>
+          <a:srgbClr val="0D1C33"/>
+        </a:solidFill>
+      </p:bgPr>
+    </p:bg>
+    <p:spTree>
+      <p:nvGrpSpPr>
+        <p:cNvPr id="1" name=""/>
+        <p:cNvGrpSpPr/>
+        <p:nvPr/>
+      </p:nvGrpSpPr>
+      <p:grpSpPr>
+        <a:xfrm>
+          <a:off x="0" y="0"/>
+          <a:ext cx="0" cy="0"/>
+          <a:chOff x="0" y="0"/>
+          <a:chExt cx="0" cy="0"/>
+        </a:xfrm>
+      </p:grpSpPr>
+      <p:sp>
+        <p:nvSpPr>
+          <p:cNvPr id="2" name="Text 0"/>
+          <p:cNvSpPr/>
+          <p:nvPr/>
+        </p:nvSpPr>
+        <p:spPr>
+          <a:xfrm>
+            <a:off x="548640" y="320040"/>
+            <a:ext cx="5486400" cy="292608"/>
+          </a:xfrm>
+          <a:prstGeom prst="rect">
+            <a:avLst/>
+          </a:prstGeom>
+          <a:noFill/>
+          <a:ln/>
+        </p:spPr>
+        <p:txBody>
+          <a:bodyPr wrap="square" lIns="0" tIns="0" rIns="0" bIns="0" rtlCol="0" anchor="ctr"/>
+          <a:lstStyle/>
+          <a:p>
+            <a:pPr indent="0" marL="0">
+              <a:buNone/>
+            </a:pPr>
+            <a:r>
+              <a:rPr lang="en-US" sz="1200" b="1" spc="300" kern="0" dirty="0">
+                <a:solidFill>
+                  <a:srgbClr val="22D3EE"/>
+                </a:solidFill>
+                <a:latin typeface="Calibri" pitchFamily="34" charset="0"/>
+                <a:ea typeface="Calibri" pitchFamily="34" charset="-122"/>
+                <a:cs typeface="Calibri" pitchFamily="34" charset="-120"/>
+              </a:rPr>
+              <a:t>SUPORTE</a:t>
+            </a:r>
+            <a:endParaRPr lang="en-US" sz="1200" dirty="0"/>
+          </a:p>
+        </p:txBody>
+      </p:sp>
+      <p:sp>
+        <p:nvSpPr>
+          <p:cNvPr id="3" name="Text 1"/>
+          <p:cNvSpPr/>
+          <p:nvPr/>
+        </p:nvSpPr>
+        <p:spPr>
+          <a:xfrm>
+            <a:off x="548640" y="566928"/>
+            <a:ext cx="11091672" cy="685800"/>
+          </a:xfrm>
+          <a:prstGeom prst="rect">
+            <a:avLst/>
+          </a:prstGeom>
+          <a:noFill/>
+          <a:ln/>
+        </p:spPr>
+        <p:txBody>
+          <a:bodyPr wrap="square" lIns="0" tIns="0" rIns="0" bIns="0" rtlCol="0" anchor="ctr"/>
+          <a:lstStyle/>
+          <a:p>
+            <a:pPr indent="0" marL="0">
+              <a:buNone/>
+            </a:pPr>
+            <a:r>
+              <a:rPr lang="en-US" sz="3000" b="1" dirty="0">
+                <a:solidFill>
+                  <a:srgbClr val="E8EEF7"/>
+                </a:solidFill>
+                <a:latin typeface="Calibri" pitchFamily="34" charset="0"/>
+                <a:ea typeface="Calibri" pitchFamily="34" charset="-122"/>
+                <a:cs typeface="Calibri" pitchFamily="34" charset="-120"/>
+              </a:rPr>
+              <a:t>Precisa de ajuda?</a:t>
+            </a:r>
+            <a:endParaRPr lang="en-US" sz="3000" dirty="0"/>
+          </a:p>
+        </p:txBody>
+      </p:sp>
+      <p:sp>
+        <p:nvSpPr>
+          <p:cNvPr id="4" name="Shape 2"/>
+          <p:cNvSpPr/>
+          <p:nvPr/>
+        </p:nvSpPr>
+        <p:spPr>
+          <a:xfrm>
+            <a:off x="640080" y="1691640"/>
+            <a:ext cx="10881360" cy="1234440"/>
+          </a:xfrm>
+          <a:prstGeom prst="roundRect">
+            <a:avLst>
+              <a:gd name="adj" fmla="val 6667"/>
+            </a:avLst>
+          </a:prstGeom>
+          <a:solidFill>
+            <a:srgbClr val="10233F"/>
+          </a:solidFill>
+          <a:ln w="12700">
+            <a:solidFill>
+              <a:srgbClr val="1D3A5F"/>
+            </a:solidFill>
+            <a:prstDash val="solid"/>
+          </a:ln>
+        </p:spPr>
+      </p:sp>
+      <p:sp>
+        <p:nvSpPr>
+          <p:cNvPr id="5" name="Text 3"/>
+          <p:cNvSpPr/>
+          <p:nvPr/>
+        </p:nvSpPr>
+        <p:spPr>
+          <a:xfrm>
+            <a:off x="841248" y="1837944"/>
+            <a:ext cx="10479024" cy="329184"/>
+          </a:xfrm>
+          <a:prstGeom prst="rect">
+            <a:avLst/>
+          </a:prstGeom>
+          <a:noFill/>
+          <a:ln/>
+        </p:spPr>
+        <p:txBody>
+          <a:bodyPr wrap="square" lIns="0" tIns="0" rIns="0" bIns="0" rtlCol="0" anchor="ctr"/>
+          <a:lstStyle/>
+          <a:p>
+            <a:pPr indent="0" marL="0">
+              <a:buNone/>
+            </a:pPr>
+            <a:r>
+              <a:rPr lang="en-US" sz="1400" b="1" dirty="0">
+                <a:solidFill>
+                  <a:srgbClr val="22D3EE"/>
+                </a:solidFill>
+                <a:latin typeface="Calibri" pitchFamily="34" charset="0"/>
+                <a:ea typeface="Calibri" pitchFamily="34" charset="-122"/>
+                <a:cs typeface="Calibri" pitchFamily="34" charset="-120"/>
+              </a:rPr>
+              <a:t>O formador não recebeu o e-mail do vídeo</a:t>
+            </a:r>
+            <a:endParaRPr lang="en-US" sz="1400" dirty="0"/>
+          </a:p>
+        </p:txBody>
+      </p:sp>
+      <p:sp>
+        <p:nvSpPr>
+          <p:cNvPr id="6" name="Text 4"/>
+          <p:cNvSpPr/>
+          <p:nvPr/>
+        </p:nvSpPr>
+        <p:spPr>
+          <a:xfrm>
+            <a:off x="841248" y="2167128"/>
+            <a:ext cx="10479024" cy="630936"/>
+          </a:xfrm>
+          <a:prstGeom prst="rect">
+            <a:avLst/>
+          </a:prstGeom>
+          <a:noFill/>
+          <a:ln/>
+        </p:spPr>
+        <p:txBody>
+          <a:bodyPr wrap="square" lIns="0" tIns="0" rIns="0" bIns="0" rtlCol="0" anchor="t"/>
+          <a:lstStyle/>
+          <a:p>
+            <a:pPr indent="0" marL="0">
+              <a:lnSpc>
+                <a:spcPct val="112000"/>
+              </a:lnSpc>
+              <a:buNone/>
+            </a:pPr>
+            <a:r>
+              <a:rPr lang="en-US" sz="1300" dirty="0">
+                <a:solidFill>
+                  <a:srgbClr val="E8EEF7"/>
+                </a:solidFill>
+                <a:latin typeface="Calibri" pitchFamily="34" charset="0"/>
+                <a:ea typeface="Calibri" pitchFamily="34" charset="-122"/>
+                <a:cs typeface="Calibri" pitchFamily="34" charset="-120"/>
+              </a:rPr>
+              <a:t>Confirme que o vídeo aparece na lista de 🎬 Vídeos. Se aparecer, o e-mail foi disparado — peça que confira o spam.</a:t>
+            </a:r>
+            <a:endParaRPr lang="en-US" sz="1300" dirty="0"/>
+          </a:p>
+        </p:txBody>
+      </p:sp>
+      <p:sp>
+        <p:nvSpPr>
+          <p:cNvPr id="7" name="Shape 5"/>
+          <p:cNvSpPr/>
+          <p:nvPr/>
+        </p:nvSpPr>
+        <p:spPr>
+          <a:xfrm>
+            <a:off x="640080" y="3108960"/>
+            <a:ext cx="10881360" cy="1234440"/>
+          </a:xfrm>
+          <a:prstGeom prst="roundRect">
+            <a:avLst>
+              <a:gd name="adj" fmla="val 6667"/>
+            </a:avLst>
+          </a:prstGeom>
+          <a:solidFill>
+            <a:srgbClr val="10233F"/>
+          </a:solidFill>
+          <a:ln w="12700">
+            <a:solidFill>
+              <a:srgbClr val="1D3A5F"/>
+            </a:solidFill>
+            <a:prstDash val="solid"/>
+          </a:ln>
+        </p:spPr>
+      </p:sp>
+      <p:sp>
+        <p:nvSpPr>
+          <p:cNvPr id="8" name="Text 6"/>
+          <p:cNvSpPr/>
+          <p:nvPr/>
+        </p:nvSpPr>
+        <p:spPr>
+          <a:xfrm>
+            <a:off x="841248" y="3255264"/>
+            <a:ext cx="10479024" cy="329184"/>
+          </a:xfrm>
+          <a:prstGeom prst="rect">
+            <a:avLst/>
+          </a:prstGeom>
+          <a:noFill/>
+          <a:ln/>
+        </p:spPr>
+        <p:txBody>
+          <a:bodyPr wrap="square" lIns="0" tIns="0" rIns="0" bIns="0" rtlCol="0" anchor="ctr"/>
+          <a:lstStyle/>
+          <a:p>
+            <a:pPr indent="0" marL="0">
+              <a:buNone/>
+            </a:pPr>
+            <a:r>
+              <a:rPr lang="en-US" sz="1400" b="1" dirty="0">
+                <a:solidFill>
+                  <a:srgbClr val="22D3EE"/>
+                </a:solidFill>
+                <a:latin typeface="Calibri" pitchFamily="34" charset="0"/>
+                <a:ea typeface="Calibri" pitchFamily="34" charset="-122"/>
+                <a:cs typeface="Calibri" pitchFamily="34" charset="-120"/>
+              </a:rPr>
+              <a:t>O botão "Baixar todos" não aparece</a:t>
+            </a:r>
+            <a:endParaRPr lang="en-US" sz="1400" dirty="0"/>
+          </a:p>
+        </p:txBody>
+      </p:sp>
+      <p:sp>
+        <p:nvSpPr>
+          <p:cNvPr id="9" name="Text 7"/>
+          <p:cNvSpPr/>
+          <p:nvPr/>
+        </p:nvSpPr>
+        <p:spPr>
+          <a:xfrm>
+            <a:off x="841248" y="3584448"/>
+            <a:ext cx="10479024" cy="630936"/>
+          </a:xfrm>
+          <a:prstGeom prst="rect">
+            <a:avLst/>
+          </a:prstGeom>
+          <a:noFill/>
+          <a:ln/>
+        </p:spPr>
+        <p:txBody>
+          <a:bodyPr wrap="square" lIns="0" tIns="0" rIns="0" bIns="0" rtlCol="0" anchor="t"/>
+          <a:lstStyle/>
+          <a:p>
+            <a:pPr indent="0" marL="0">
+              <a:lnSpc>
+                <a:spcPct val="112000"/>
+              </a:lnSpc>
+              <a:buNone/>
+            </a:pPr>
+            <a:r>
+              <a:rPr lang="en-US" sz="1300" dirty="0">
+                <a:solidFill>
+                  <a:srgbClr val="E8EEF7"/>
+                </a:solidFill>
+                <a:latin typeface="Calibri" pitchFamily="34" charset="0"/>
+                <a:ea typeface="Calibri" pitchFamily="34" charset="-122"/>
+                <a:cs typeface="Calibri" pitchFamily="34" charset="-120"/>
+              </a:rPr>
+              <a:t>O curso ainda não tem materiais enviados pelo formador.</a:t>
+            </a:r>
+            <a:endParaRPr lang="en-US" sz="1300" dirty="0"/>
+          </a:p>
+        </p:txBody>
+      </p:sp>
+      <p:sp>
+        <p:nvSpPr>
+          <p:cNvPr id="10" name="Shape 8"/>
+          <p:cNvSpPr/>
+          <p:nvPr/>
+        </p:nvSpPr>
+        <p:spPr>
+          <a:xfrm>
+            <a:off x="640080" y="4526280"/>
+            <a:ext cx="10881360" cy="1234440"/>
+          </a:xfrm>
+          <a:prstGeom prst="roundRect">
+            <a:avLst>
+              <a:gd name="adj" fmla="val 6667"/>
+            </a:avLst>
+          </a:prstGeom>
+          <a:solidFill>
+            <a:srgbClr val="10233F"/>
+          </a:solidFill>
+          <a:ln w="12700">
+            <a:solidFill>
+              <a:srgbClr val="1D3A5F"/>
+            </a:solidFill>
+            <a:prstDash val="solid"/>
+          </a:ln>
+        </p:spPr>
+      </p:sp>
+      <p:sp>
+        <p:nvSpPr>
+          <p:cNvPr id="11" name="Text 9"/>
+          <p:cNvSpPr/>
+          <p:nvPr/>
+        </p:nvSpPr>
+        <p:spPr>
+          <a:xfrm>
+            <a:off x="841248" y="4672584"/>
+            <a:ext cx="10479024" cy="329184"/>
+          </a:xfrm>
+          <a:prstGeom prst="rect">
+            <a:avLst/>
+          </a:prstGeom>
+          <a:noFill/>
+          <a:ln/>
+        </p:spPr>
+        <p:txBody>
+          <a:bodyPr wrap="square" lIns="0" tIns="0" rIns="0" bIns="0" rtlCol="0" anchor="ctr"/>
+          <a:lstStyle/>
+          <a:p>
+            <a:pPr indent="0" marL="0">
+              <a:buNone/>
+            </a:pPr>
+            <a:r>
+              <a:rPr lang="en-US" sz="1400" b="1" dirty="0">
+                <a:solidFill>
+                  <a:srgbClr val="22D3EE"/>
+                </a:solidFill>
+                <a:latin typeface="Calibri" pitchFamily="34" charset="0"/>
+                <a:ea typeface="Calibri" pitchFamily="34" charset="-122"/>
+                <a:cs typeface="Calibri" pitchFamily="34" charset="-120"/>
+              </a:rPr>
+              <a:t>Não consigo mover o status</a:t>
+            </a:r>
+            <a:endParaRPr lang="en-US" sz="1400" dirty="0"/>
+          </a:p>
+        </p:txBody>
+      </p:sp>
+      <p:sp>
+        <p:nvSpPr>
+          <p:cNvPr id="12" name="Text 10"/>
+          <p:cNvSpPr/>
+          <p:nvPr/>
+        </p:nvSpPr>
+        <p:spPr>
+          <a:xfrm>
+            <a:off x="841248" y="5001768"/>
+            <a:ext cx="10479024" cy="630936"/>
+          </a:xfrm>
+          <a:prstGeom prst="rect">
+            <a:avLst/>
+          </a:prstGeom>
+          <a:noFill/>
+          <a:ln/>
+        </p:spPr>
+        <p:txBody>
+          <a:bodyPr wrap="square" lIns="0" tIns="0" rIns="0" bIns="0" rtlCol="0" anchor="t"/>
+          <a:lstStyle/>
+          <a:p>
+            <a:pPr indent="0" marL="0">
+              <a:lnSpc>
+                <a:spcPct val="112000"/>
+              </a:lnSpc>
+              <a:buNone/>
+            </a:pPr>
+            <a:r>
+              <a:rPr lang="en-US" sz="1300" dirty="0">
+                <a:solidFill>
+                  <a:srgbClr val="E8EEF7"/>
+                </a:solidFill>
+                <a:latin typeface="Calibri" pitchFamily="34" charset="0"/>
+                <a:ea typeface="Calibri" pitchFamily="34" charset="-122"/>
+                <a:cs typeface="Calibri" pitchFamily="34" charset="-120"/>
+              </a:rPr>
+              <a:t>A MB move apenas nas suas 3 transições. Em outra fase, a ação é de outra equipe.</a:t>
+            </a:r>
+            <a:endParaRPr lang="en-US" sz="1300" dirty="0"/>
+          </a:p>
+        </p:txBody>
+      </p:sp>
+      <p:sp>
+        <p:nvSpPr>
+          <p:cNvPr id="13" name="Text 11"/>
+          <p:cNvSpPr/>
+          <p:nvPr/>
+        </p:nvSpPr>
+        <p:spPr>
+          <a:xfrm>
+            <a:off x="640080" y="5943600"/>
+            <a:ext cx="10058400" cy="365760"/>
+          </a:xfrm>
+          <a:prstGeom prst="rect">
+            <a:avLst/>
+          </a:prstGeom>
+          <a:noFill/>
+          <a:ln/>
+        </p:spPr>
+        <p:txBody>
+          <a:bodyPr wrap="square" lIns="0" tIns="0" rIns="0" bIns="0" rtlCol="0" anchor="ctr"/>
+          <a:lstStyle/>
+          <a:p>
+            <a:pPr indent="0" marL="0">
+              <a:buNone/>
+            </a:pPr>
+            <a:r>
+              <a:rPr lang="en-US" sz="1600" dirty="0">
+                <a:solidFill>
+                  <a:srgbClr val="8BAAC8"/>
+                </a:solidFill>
+                <a:latin typeface="Calibri" pitchFamily="34" charset="0"/>
+                <a:ea typeface="Calibri" pitchFamily="34" charset="-122"/>
+                <a:cs typeface="Calibri" pitchFamily="34" charset="-120"/>
+              </a:rPr>
+              <a:t>Equipe de TI do CECAPE  •  </a:t>
+            </a:r>
+            <a:pPr indent="0" marL="0">
+              <a:buNone/>
+            </a:pPr>
+            <a:r>
+              <a:rPr lang="en-US" sz="1600" b="1" dirty="0">
+                <a:solidFill>
+                  <a:srgbClr val="22D3EE"/>
+                </a:solidFill>
+                <a:latin typeface="Calibri" pitchFamily="34" charset="0"/>
+                <a:ea typeface="Calibri" pitchFamily="34" charset="-122"/>
+                <a:cs typeface="Calibri" pitchFamily="34" charset="-120"/>
+              </a:rPr>
+              <a:t>ti.cecape@scseduca.com.br</a:t>
+            </a:r>
+            <a:endParaRPr lang="en-US" sz="1600" dirty="0"/>
+          </a:p>
+        </p:txBody>
+      </p:sp>
+      <p:sp>
+        <p:nvSpPr>
+          <p:cNvPr id="14" name="Text 12"/>
+          <p:cNvSpPr/>
+          <p:nvPr/>
+        </p:nvSpPr>
+        <p:spPr>
+          <a:xfrm>
+            <a:off x="548640" y="6473952"/>
+            <a:ext cx="7315200" cy="274320"/>
+          </a:xfrm>
+          <a:prstGeom prst="rect">
+            <a:avLst/>
+          </a:prstGeom>
+          <a:noFill/>
+          <a:ln/>
+        </p:spPr>
+        <p:txBody>
+          <a:bodyPr wrap="square" lIns="0" tIns="0" rIns="0" bIns="0" rtlCol="0" anchor="ctr"/>
+          <a:lstStyle/>
+          <a:p>
+            <a:pPr indent="0" marL="0">
+              <a:buNone/>
+            </a:pPr>
+            <a:r>
+              <a:rPr lang="en-US" sz="950" dirty="0">
+                <a:solidFill>
+                  <a:srgbClr val="8BAAC8"/>
+                </a:solidFill>
+                <a:latin typeface="Calibri" pitchFamily="34" charset="0"/>
+                <a:ea typeface="Calibri" pitchFamily="34" charset="-122"/>
+                <a:cs typeface="Calibri" pitchFamily="34" charset="-120"/>
+              </a:rPr>
+              <a:t>AutoriaSCS • Gestão de Cursos  —  Tutorial da MB Estúdios</a:t>
+            </a:r>
+            <a:endParaRPr lang="en-US" sz="950" dirty="0"/>
+          </a:p>
+        </p:txBody>
+      </p:sp>
+      <p:sp>
+        <p:nvSpPr>
+          <p:cNvPr id="15" name="Text 13"/>
+          <p:cNvSpPr/>
+          <p:nvPr/>
+        </p:nvSpPr>
+        <p:spPr>
+          <a:xfrm>
+            <a:off x="10725912" y="6473952"/>
+            <a:ext cx="914400" cy="274320"/>
+          </a:xfrm>
+          <a:prstGeom prst="rect">
+            <a:avLst/>
+          </a:prstGeom>
+          <a:noFill/>
+          <a:ln/>
+        </p:spPr>
+        <p:txBody>
+          <a:bodyPr wrap="square" lIns="0" tIns="0" rIns="0" bIns="0" rtlCol="0" anchor="ctr"/>
+          <a:lstStyle/>
+          <a:p>
+            <a:pPr algn="r" indent="0" marL="0">
+              <a:buNone/>
+            </a:pPr>
+            <a:r>
+              <a:rPr lang="en-US" sz="950" dirty="0">
+                <a:solidFill>
+                  <a:srgbClr val="8BAAC8"/>
+                </a:solidFill>
+                <a:latin typeface="Calibri" pitchFamily="34" charset="0"/>
+                <a:ea typeface="Calibri" pitchFamily="34" charset="-122"/>
+                <a:cs typeface="Calibri" pitchFamily="34" charset="-120"/>
+              </a:rPr>
+              <a:t>11 / 11</a:t>
+            </a:r>
+            <a:endParaRPr lang="en-US" sz="950" dirty="0"/>
           </a:p>
         </p:txBody>
       </p:sp>
@@ -2025,7 +3388,7 @@
         </p:nvSpPr>
         <p:spPr>
           <a:xfrm>
-            <a:off x="640080" y="1691640"/>
+            <a:off x="640080" y="1783080"/>
             <a:ext cx="384048" cy="384048"/>
           </a:xfrm>
           <a:prstGeom prst="ellipse">
@@ -2050,7 +3413,7 @@
         </p:nvSpPr>
         <p:spPr>
           <a:xfrm>
-            <a:off x="640080" y="1691640"/>
+            <a:off x="640080" y="1783080"/>
             <a:ext cx="384048" cy="384048"/>
           </a:xfrm>
           <a:prstGeom prst="rect">
@@ -2089,7 +3452,7 @@
         </p:nvSpPr>
         <p:spPr>
           <a:xfrm>
-            <a:off x="1207008" y="1655064"/>
+            <a:off x="1207008" y="1746504"/>
             <a:ext cx="4828032" cy="731520"/>
           </a:xfrm>
           <a:prstGeom prst="rect">
@@ -2128,7 +3491,7 @@
         </p:nvSpPr>
         <p:spPr>
           <a:xfrm>
-            <a:off x="640080" y="2532888"/>
+            <a:off x="640080" y="2862072"/>
             <a:ext cx="384048" cy="384048"/>
           </a:xfrm>
           <a:prstGeom prst="ellipse">
@@ -2153,7 +3516,7 @@
         </p:nvSpPr>
         <p:spPr>
           <a:xfrm>
-            <a:off x="640080" y="2532888"/>
+            <a:off x="640080" y="2862072"/>
             <a:ext cx="384048" cy="384048"/>
           </a:xfrm>
           <a:prstGeom prst="rect">
@@ -2192,7 +3555,7 @@
         </p:nvSpPr>
         <p:spPr>
           <a:xfrm>
-            <a:off x="1207008" y="2496312"/>
+            <a:off x="1207008" y="2825496"/>
             <a:ext cx="4828032" cy="731520"/>
           </a:xfrm>
           <a:prstGeom prst="rect">
@@ -2217,7 +3580,7 @@
                 <a:ea typeface="Calibri" pitchFamily="34" charset="-122"/>
                 <a:cs typeface="Calibri" pitchFamily="34" charset="-120"/>
               </a:rPr>
-              <a:t>Encontrar os cursos no Kanban</a:t>
+              <a:t>Encontrar os cursos</a:t>
             </a:r>
             <a:endParaRPr lang="en-US" sz="1550" dirty="0"/>
           </a:p>
@@ -2231,7 +3594,7 @@
         </p:nvSpPr>
         <p:spPr>
           <a:xfrm>
-            <a:off x="640080" y="3374136"/>
+            <a:off x="640080" y="3941064"/>
             <a:ext cx="384048" cy="384048"/>
           </a:xfrm>
           <a:prstGeom prst="ellipse">
@@ -2256,7 +3619,7 @@
         </p:nvSpPr>
         <p:spPr>
           <a:xfrm>
-            <a:off x="640080" y="3374136"/>
+            <a:off x="640080" y="3941064"/>
             <a:ext cx="384048" cy="384048"/>
           </a:xfrm>
           <a:prstGeom prst="rect">
@@ -2295,7 +3658,7 @@
         </p:nvSpPr>
         <p:spPr>
           <a:xfrm>
-            <a:off x="1207008" y="3337560"/>
+            <a:off x="1207008" y="3904488"/>
             <a:ext cx="4828032" cy="731520"/>
           </a:xfrm>
           <a:prstGeom prst="rect">
@@ -2334,7 +3697,7 @@
         </p:nvSpPr>
         <p:spPr>
           <a:xfrm>
-            <a:off x="640080" y="4215384"/>
+            <a:off x="640080" y="5020056"/>
             <a:ext cx="384048" cy="384048"/>
           </a:xfrm>
           <a:prstGeom prst="ellipse">
@@ -2359,7 +3722,7 @@
         </p:nvSpPr>
         <p:spPr>
           <a:xfrm>
-            <a:off x="640080" y="4215384"/>
+            <a:off x="640080" y="5020056"/>
             <a:ext cx="384048" cy="384048"/>
           </a:xfrm>
           <a:prstGeom prst="rect">
@@ -2398,7 +3761,7 @@
         </p:nvSpPr>
         <p:spPr>
           <a:xfrm>
-            <a:off x="1207008" y="4178808"/>
+            <a:off x="1207008" y="4983480"/>
             <a:ext cx="4828032" cy="731520"/>
           </a:xfrm>
           <a:prstGeom prst="rect">
@@ -2437,7 +3800,7 @@
         </p:nvSpPr>
         <p:spPr>
           <a:xfrm>
-            <a:off x="6492240" y="1691640"/>
+            <a:off x="6492240" y="1783080"/>
             <a:ext cx="384048" cy="384048"/>
           </a:xfrm>
           <a:prstGeom prst="ellipse">
@@ -2462,7 +3825,7 @@
         </p:nvSpPr>
         <p:spPr>
           <a:xfrm>
-            <a:off x="6492240" y="1691640"/>
+            <a:off x="6492240" y="1783080"/>
             <a:ext cx="384048" cy="384048"/>
           </a:xfrm>
           <a:prstGeom prst="rect">
@@ -2501,7 +3864,7 @@
         </p:nvSpPr>
         <p:spPr>
           <a:xfrm>
-            <a:off x="7059168" y="1655064"/>
+            <a:off x="7059168" y="1746504"/>
             <a:ext cx="4828032" cy="731520"/>
           </a:xfrm>
           <a:prstGeom prst="rect">
@@ -2526,7 +3889,7 @@
                 <a:ea typeface="Calibri" pitchFamily="34" charset="-122"/>
                 <a:cs typeface="Calibri" pitchFamily="34" charset="-120"/>
               </a:rPr>
-              <a:t>A lista de arquivos</a:t>
+              <a:t>Disponibilizar vídeos</a:t>
             </a:r>
             <a:endParaRPr lang="en-US" sz="1550" dirty="0"/>
           </a:p>
@@ -2540,7 +3903,7 @@
         </p:nvSpPr>
         <p:spPr>
           <a:xfrm>
-            <a:off x="6492240" y="2532888"/>
+            <a:off x="6492240" y="2862072"/>
             <a:ext cx="384048" cy="384048"/>
           </a:xfrm>
           <a:prstGeom prst="ellipse">
@@ -2565,7 +3928,7 @@
         </p:nvSpPr>
         <p:spPr>
           <a:xfrm>
-            <a:off x="6492240" y="2532888"/>
+            <a:off x="6492240" y="2862072"/>
             <a:ext cx="384048" cy="384048"/>
           </a:xfrm>
           <a:prstGeom prst="rect">
@@ -2604,7 +3967,7 @@
         </p:nvSpPr>
         <p:spPr>
           <a:xfrm>
-            <a:off x="7059168" y="2496312"/>
+            <a:off x="7059168" y="2825496"/>
             <a:ext cx="4828032" cy="731520"/>
           </a:xfrm>
           <a:prstGeom prst="rect">
@@ -2629,7 +3992,7 @@
                 <a:ea typeface="Calibri" pitchFamily="34" charset="-122"/>
                 <a:cs typeface="Calibri" pitchFamily="34" charset="-120"/>
               </a:rPr>
-              <a:t>O que a conta MB não faz</a:t>
+              <a:t>Tratar os apontamentos</a:t>
             </a:r>
             <a:endParaRPr lang="en-US" sz="1550" dirty="0"/>
           </a:p>
@@ -2643,7 +4006,7 @@
         </p:nvSpPr>
         <p:spPr>
           <a:xfrm>
-            <a:off x="6492240" y="3374136"/>
+            <a:off x="6492240" y="3941064"/>
             <a:ext cx="384048" cy="384048"/>
           </a:xfrm>
           <a:prstGeom prst="ellipse">
@@ -2668,7 +4031,7 @@
         </p:nvSpPr>
         <p:spPr>
           <a:xfrm>
-            <a:off x="6492240" y="3374136"/>
+            <a:off x="6492240" y="3941064"/>
             <a:ext cx="384048" cy="384048"/>
           </a:xfrm>
           <a:prstGeom prst="rect">
@@ -2707,7 +4070,7 @@
         </p:nvSpPr>
         <p:spPr>
           <a:xfrm>
-            <a:off x="7059168" y="3337560"/>
+            <a:off x="7059168" y="3904488"/>
             <a:ext cx="4828032" cy="731520"/>
           </a:xfrm>
           <a:prstGeom prst="rect">
@@ -2732,7 +4095,7 @@
                 <a:ea typeface="Calibri" pitchFamily="34" charset="-122"/>
                 <a:cs typeface="Calibri" pitchFamily="34" charset="-120"/>
               </a:rPr>
-              <a:t>Problemas comuns e suporte</a:t>
+              <a:t>Enviar versões corrigidas</a:t>
             </a:r>
             <a:endParaRPr lang="en-US" sz="1550" dirty="0"/>
           </a:p>
@@ -2740,7 +4103,110 @@
       </p:sp>
       <p:sp>
         <p:nvSpPr>
-          <p:cNvPr id="25" name="Text 23"/>
+          <p:cNvPr id="25" name="Shape 23"/>
+          <p:cNvSpPr/>
+          <p:nvPr/>
+        </p:nvSpPr>
+        <p:spPr>
+          <a:xfrm>
+            <a:off x="6492240" y="5020056"/>
+            <a:ext cx="384048" cy="384048"/>
+          </a:xfrm>
+          <a:prstGeom prst="ellipse">
+            <a:avLst/>
+          </a:prstGeom>
+          <a:solidFill>
+            <a:srgbClr val="10233F"/>
+          </a:solidFill>
+          <a:ln w="17780">
+            <a:solidFill>
+              <a:srgbClr val="22D3EE"/>
+            </a:solidFill>
+            <a:prstDash val="solid"/>
+          </a:ln>
+        </p:spPr>
+      </p:sp>
+      <p:sp>
+        <p:nvSpPr>
+          <p:cNvPr id="26" name="Text 24"/>
+          <p:cNvSpPr/>
+          <p:nvPr/>
+        </p:nvSpPr>
+        <p:spPr>
+          <a:xfrm>
+            <a:off x="6492240" y="5020056"/>
+            <a:ext cx="384048" cy="384048"/>
+          </a:xfrm>
+          <a:prstGeom prst="rect">
+            <a:avLst/>
+          </a:prstGeom>
+          <a:noFill/>
+          <a:ln/>
+        </p:spPr>
+        <p:txBody>
+          <a:bodyPr wrap="square" lIns="0" tIns="0" rIns="0" bIns="0" rtlCol="0" anchor="ctr"/>
+          <a:lstStyle/>
+          <a:p>
+            <a:pPr algn="ctr" indent="0" marL="0">
+              <a:buNone/>
+            </a:pPr>
+            <a:r>
+              <a:rPr lang="en-US" sz="1400" b="1" dirty="0">
+                <a:solidFill>
+                  <a:srgbClr val="22D3EE"/>
+                </a:solidFill>
+                <a:latin typeface="Calibri" pitchFamily="34" charset="0"/>
+                <a:ea typeface="Calibri" pitchFamily="34" charset="-122"/>
+                <a:cs typeface="Calibri" pitchFamily="34" charset="-120"/>
+              </a:rPr>
+              <a:t>8</a:t>
+            </a:r>
+            <a:endParaRPr lang="en-US" sz="1400" dirty="0"/>
+          </a:p>
+        </p:txBody>
+      </p:sp>
+      <p:sp>
+        <p:nvSpPr>
+          <p:cNvPr id="27" name="Text 25"/>
+          <p:cNvSpPr/>
+          <p:nvPr/>
+        </p:nvSpPr>
+        <p:spPr>
+          <a:xfrm>
+            <a:off x="7059168" y="4983480"/>
+            <a:ext cx="4828032" cy="731520"/>
+          </a:xfrm>
+          <a:prstGeom prst="rect">
+            <a:avLst/>
+          </a:prstGeom>
+          <a:noFill/>
+          <a:ln/>
+        </p:spPr>
+        <p:txBody>
+          <a:bodyPr wrap="square" lIns="0" tIns="0" rIns="0" bIns="0" rtlCol="0" anchor="t"/>
+          <a:lstStyle/>
+          <a:p>
+            <a:pPr indent="0" marL="0">
+              <a:buNone/>
+            </a:pPr>
+            <a:r>
+              <a:rPr lang="en-US" sz="1550" b="1" dirty="0">
+                <a:solidFill>
+                  <a:srgbClr val="E8EEF7"/>
+                </a:solidFill>
+                <a:latin typeface="Calibri" pitchFamily="34" charset="0"/>
+                <a:ea typeface="Calibri" pitchFamily="34" charset="-122"/>
+                <a:cs typeface="Calibri" pitchFamily="34" charset="-120"/>
+              </a:rPr>
+              <a:t>O que a conta MB não faz</a:t>
+            </a:r>
+            <a:endParaRPr lang="en-US" sz="1550" dirty="0"/>
+          </a:p>
+        </p:txBody>
+      </p:sp>
+      <p:sp>
+        <p:nvSpPr>
+          <p:cNvPr id="28" name="Text 26"/>
           <p:cNvSpPr/>
           <p:nvPr/>
         </p:nvSpPr>
@@ -2779,7 +4245,7 @@
       </p:sp>
       <p:sp>
         <p:nvSpPr>
-          <p:cNvPr id="26" name="Text 24"/>
+          <p:cNvPr id="29" name="Text 27"/>
           <p:cNvSpPr/>
           <p:nvPr/>
         </p:nvSpPr>
@@ -2810,7 +4276,7 @@
                 <a:ea typeface="Calibri" pitchFamily="34" charset="-122"/>
                 <a:cs typeface="Calibri" pitchFamily="34" charset="-120"/>
               </a:rPr>
-              <a:t>2 / 9</a:t>
+              <a:t>2 / 11</a:t>
             </a:r>
             <a:endParaRPr lang="en-US" sz="950" dirty="0"/>
           </a:p>
@@ -2920,7 +4386,7 @@
                 <a:ea typeface="Calibri" pitchFamily="34" charset="-122"/>
                 <a:cs typeface="Calibri" pitchFamily="34" charset="-120"/>
               </a:rPr>
-              <a:t>1. A MB entra em cena duas vezes</a:t>
+              <a:t>1. O papel da MB</a:t>
             </a:r>
             <a:endParaRPr lang="en-US" sz="3000" dirty="0"/>
           </a:p>
@@ -2935,11 +4401,11 @@
         <p:spPr>
           <a:xfrm>
             <a:off x="640080" y="1645920"/>
-            <a:ext cx="5394960" cy="2377440"/>
+            <a:ext cx="3566160" cy="1874520"/>
           </a:xfrm>
           <a:prstGeom prst="roundRect">
             <a:avLst>
-              <a:gd name="adj" fmla="val 3462"/>
+              <a:gd name="adj" fmla="val 4390"/>
             </a:avLst>
           </a:prstGeom>
           <a:solidFill>
@@ -2962,7 +4428,7 @@
         <p:spPr>
           <a:xfrm>
             <a:off x="841248" y="1792224"/>
-            <a:ext cx="4992624" cy="329184"/>
+            <a:ext cx="3163824" cy="329184"/>
           </a:xfrm>
           <a:prstGeom prst="rect">
             <a:avLst/>
@@ -2986,7 +4452,7 @@
                 <a:ea typeface="Calibri" pitchFamily="34" charset="-122"/>
                 <a:cs typeface="Calibri" pitchFamily="34" charset="-120"/>
               </a:rPr>
-              <a:t>Momento 1 — Inserção</a:t>
+              <a:t>Produção dos vídeos</a:t>
             </a:r>
             <a:endParaRPr lang="en-US" sz="1400" dirty="0"/>
           </a:p>
@@ -3001,7 +4467,7 @@
         <p:spPr>
           <a:xfrm>
             <a:off x="841248" y="2121408"/>
-            <a:ext cx="4992624" cy="1773936"/>
+            <a:ext cx="3163824" cy="1271016"/>
           </a:xfrm>
           <a:prstGeom prst="rect">
             <a:avLst/>
@@ -3028,39 +4494,10 @@
                 <a:ea typeface="Calibri" pitchFamily="34" charset="-122"/>
                 <a:cs typeface="Calibri" pitchFamily="34" charset="-120"/>
               </a:rPr>
-              <a:t>A TI aprova e move para "Enviado para Inserção" → a MB recebe e-mail.</a:t>
+              <a:t>A MB produz as videoaulas e as disponibiliza no sistema para o(a) formador(a) analisar.</a:t>
             </a:r>
             <a:endParaRPr lang="en-US" sz="1300" dirty="0"/>
           </a:p>
-          <a:p>
-            <a:pPr indent="0" marL="0">
-              <a:lnSpc>
-                <a:spcPct val="112000"/>
-              </a:lnSpc>
-              <a:buNone/>
-            </a:pPr>
-            <a:endParaRPr lang="en-US" sz="1300" dirty="0"/>
-          </a:p>
-          <a:p>
-            <a:pPr indent="0" marL="0">
-              <a:lnSpc>
-                <a:spcPct val="112000"/>
-              </a:lnSpc>
-              <a:buNone/>
-            </a:pPr>
-            <a:r>
-              <a:rPr lang="en-US" sz="1300" dirty="0">
-                <a:solidFill>
-                  <a:srgbClr val="E8EEF7"/>
-                </a:solidFill>
-                <a:latin typeface="Calibri" pitchFamily="34" charset="0"/>
-                <a:ea typeface="Calibri" pitchFamily="34" charset="-122"/>
-                <a:cs typeface="Calibri" pitchFamily="34" charset="-120"/>
-              </a:rPr>
-              <a:t>Baixe o pacote de materiais, monte o curso na plataforma e registre: Em Inserção → Inserido.</a:t>
-            </a:r>
-            <a:endParaRPr lang="en-US" sz="1300" dirty="0"/>
-          </a:p>
         </p:txBody>
       </p:sp>
       <p:sp>
@@ -3071,12 +4508,12 @@
         </p:nvSpPr>
         <p:spPr>
           <a:xfrm>
-            <a:off x="6217920" y="1645920"/>
-            <a:ext cx="5394960" cy="2377440"/>
+            <a:off x="4389120" y="1645920"/>
+            <a:ext cx="3566160" cy="1874520"/>
           </a:xfrm>
           <a:prstGeom prst="roundRect">
             <a:avLst>
-              <a:gd name="adj" fmla="val 3462"/>
+              <a:gd name="adj" fmla="val 4390"/>
             </a:avLst>
           </a:prstGeom>
           <a:solidFill>
@@ -3098,8 +4535,8 @@
         </p:nvSpPr>
         <p:spPr>
           <a:xfrm>
-            <a:off x="6419088" y="1792224"/>
-            <a:ext cx="4992624" cy="329184"/>
+            <a:off x="4590288" y="1792224"/>
+            <a:ext cx="3163824" cy="329184"/>
           </a:xfrm>
           <a:prstGeom prst="rect">
             <a:avLst/>
@@ -3123,7 +4560,7 @@
                 <a:ea typeface="Calibri" pitchFamily="34" charset="-122"/>
                 <a:cs typeface="Calibri" pitchFamily="34" charset="-120"/>
               </a:rPr>
-              <a:t>Momento 2 — Publicação</a:t>
+              <a:t>Momento 1 — Inserção</a:t>
             </a:r>
             <a:endParaRPr lang="en-US" sz="1400" dirty="0"/>
           </a:p>
@@ -3137,8 +4574,8 @@
         </p:nvSpPr>
         <p:spPr>
           <a:xfrm>
-            <a:off x="6419088" y="2121408"/>
-            <a:ext cx="4992624" cy="1773936"/>
+            <a:off x="4590288" y="2121408"/>
+            <a:ext cx="3163824" cy="1271016"/>
           </a:xfrm>
           <a:prstGeom prst="rect">
             <a:avLst/>
@@ -3165,39 +4602,10 @@
                 <a:ea typeface="Calibri" pitchFamily="34" charset="-122"/>
                 <a:cs typeface="Calibri" pitchFamily="34" charset="-120"/>
               </a:rPr>
-              <a:t>Formador valida, TI agenda a data ("Pronto para Publicação") → a MB recebe e-mail com a data.</a:t>
+              <a:t>A TI move para "Enviado para Inserção" → a MB baixa o pacote, monta o curso e marca Em Inserção → Inserido.</a:t>
             </a:r>
             <a:endParaRPr lang="en-US" sz="1300" dirty="0"/>
           </a:p>
-          <a:p>
-            <a:pPr indent="0" marL="0">
-              <a:lnSpc>
-                <a:spcPct val="112000"/>
-              </a:lnSpc>
-              <a:buNone/>
-            </a:pPr>
-            <a:endParaRPr lang="en-US" sz="1300" dirty="0"/>
-          </a:p>
-          <a:p>
-            <a:pPr indent="0" marL="0">
-              <a:lnSpc>
-                <a:spcPct val="112000"/>
-              </a:lnSpc>
-              <a:buNone/>
-            </a:pPr>
-            <a:r>
-              <a:rPr lang="en-US" sz="1300" dirty="0">
-                <a:solidFill>
-                  <a:srgbClr val="E8EEF7"/>
-                </a:solidFill>
-                <a:latin typeface="Calibri" pitchFamily="34" charset="0"/>
-                <a:ea typeface="Calibri" pitchFamily="34" charset="-122"/>
-                <a:cs typeface="Calibri" pitchFamily="34" charset="-120"/>
-              </a:rPr>
-              <a:t>No dia, publique na plataforma e marque: Publicado.</a:t>
-            </a:r>
-            <a:endParaRPr lang="en-US" sz="1300" dirty="0"/>
-          </a:p>
         </p:txBody>
       </p:sp>
       <p:sp>
@@ -3208,12 +4616,12 @@
         </p:nvSpPr>
         <p:spPr>
           <a:xfrm>
-            <a:off x="640080" y="4297680"/>
-            <a:ext cx="10972800" cy="1737360"/>
+            <a:off x="8138160" y="1645920"/>
+            <a:ext cx="3474720" cy="1874520"/>
           </a:xfrm>
           <a:prstGeom prst="roundRect">
             <a:avLst>
-              <a:gd name="adj" fmla="val 4737"/>
+              <a:gd name="adj" fmla="val 4390"/>
             </a:avLst>
           </a:prstGeom>
           <a:solidFill>
@@ -3235,8 +4643,8 @@
         </p:nvSpPr>
         <p:spPr>
           <a:xfrm>
-            <a:off x="841248" y="4443984"/>
-            <a:ext cx="10570464" cy="329184"/>
+            <a:off x="8339328" y="1792224"/>
+            <a:ext cx="3072384" cy="329184"/>
           </a:xfrm>
           <a:prstGeom prst="rect">
             <a:avLst/>
@@ -3260,7 +4668,7 @@
                 <a:ea typeface="Calibri" pitchFamily="34" charset="-122"/>
                 <a:cs typeface="Calibri" pitchFamily="34" charset="-120"/>
               </a:rPr>
-              <a:t>Avisos automáticos</a:t>
+              <a:t>Momento 2 — Publicação</a:t>
             </a:r>
             <a:endParaRPr lang="en-US" sz="1400" dirty="0"/>
           </a:p>
@@ -3274,8 +4682,8 @@
         </p:nvSpPr>
         <p:spPr>
           <a:xfrm>
-            <a:off x="841248" y="4773168"/>
-            <a:ext cx="10570464" cy="1133856"/>
+            <a:off x="8339328" y="2121408"/>
+            <a:ext cx="3072384" cy="1271016"/>
           </a:xfrm>
           <a:prstGeom prst="rect">
             <a:avLst/>
@@ -3302,7 +4710,7 @@
                 <a:ea typeface="Calibri" pitchFamily="34" charset="-122"/>
                 <a:cs typeface="Calibri" pitchFamily="34" charset="-120"/>
               </a:rPr>
-              <a:t>Ao marcar "Inserido", o formador e a TI recebem e-mail para iniciar a validação. Ao marcar "Publicado", o formador recebe a confirmação. Você não precisa avisar ninguém por fora do sistema.</a:t>
+              <a:t>Com a data agendada pela TI, a MB publica na plataforma e marca Publicado.</a:t>
             </a:r>
             <a:endParaRPr lang="en-US" sz="1300" dirty="0"/>
           </a:p>
@@ -3310,7 +4718,115 @@
       </p:sp>
       <p:sp>
         <p:nvSpPr>
-          <p:cNvPr id="13" name="Text 11"/>
+          <p:cNvPr id="13" name="Shape 11"/>
+          <p:cNvSpPr/>
+          <p:nvPr/>
+        </p:nvSpPr>
+        <p:spPr>
+          <a:xfrm>
+            <a:off x="640080" y="3840480"/>
+            <a:ext cx="10972800" cy="2148840"/>
+          </a:xfrm>
+          <a:prstGeom prst="roundRect">
+            <a:avLst>
+              <a:gd name="adj" fmla="val 3830"/>
+            </a:avLst>
+          </a:prstGeom>
+          <a:solidFill>
+            <a:srgbClr val="10233F"/>
+          </a:solidFill>
+          <a:ln w="12700">
+            <a:solidFill>
+              <a:srgbClr val="1D3A5F"/>
+            </a:solidFill>
+            <a:prstDash val="solid"/>
+          </a:ln>
+        </p:spPr>
+      </p:sp>
+      <p:sp>
+        <p:nvSpPr>
+          <p:cNvPr id="14" name="Text 12"/>
+          <p:cNvSpPr/>
+          <p:nvPr/>
+        </p:nvSpPr>
+        <p:spPr>
+          <a:xfrm>
+            <a:off x="841248" y="3986784"/>
+            <a:ext cx="10570464" cy="329184"/>
+          </a:xfrm>
+          <a:prstGeom prst="rect">
+            <a:avLst/>
+          </a:prstGeom>
+          <a:noFill/>
+          <a:ln/>
+        </p:spPr>
+        <p:txBody>
+          <a:bodyPr wrap="square" lIns="0" tIns="0" rIns="0" bIns="0" rtlCol="0" anchor="ctr"/>
+          <a:lstStyle/>
+          <a:p>
+            <a:pPr indent="0" marL="0">
+              <a:buNone/>
+            </a:pPr>
+            <a:r>
+              <a:rPr lang="en-US" sz="1400" b="1" dirty="0">
+                <a:solidFill>
+                  <a:srgbClr val="34D399"/>
+                </a:solidFill>
+                <a:latin typeface="Calibri" pitchFamily="34" charset="0"/>
+                <a:ea typeface="Calibri" pitchFamily="34" charset="-122"/>
+                <a:cs typeface="Calibri" pitchFamily="34" charset="-120"/>
+              </a:rPr>
+              <a:t>Antes de tudo: a identificação do curso</a:t>
+            </a:r>
+            <a:endParaRPr lang="en-US" sz="1400" dirty="0"/>
+          </a:p>
+        </p:txBody>
+      </p:sp>
+      <p:sp>
+        <p:nvSpPr>
+          <p:cNvPr id="15" name="Text 13"/>
+          <p:cNvSpPr/>
+          <p:nvPr/>
+        </p:nvSpPr>
+        <p:spPr>
+          <a:xfrm>
+            <a:off x="841248" y="4315968"/>
+            <a:ext cx="10570464" cy="1545336"/>
+          </a:xfrm>
+          <a:prstGeom prst="rect">
+            <a:avLst/>
+          </a:prstGeom>
+          <a:noFill/>
+          <a:ln/>
+        </p:spPr>
+        <p:txBody>
+          <a:bodyPr wrap="square" lIns="0" tIns="0" rIns="0" bIns="0" rtlCol="0" anchor="t"/>
+          <a:lstStyle/>
+          <a:p>
+            <a:pPr indent="0" marL="0">
+              <a:lnSpc>
+                <a:spcPct val="112000"/>
+              </a:lnSpc>
+              <a:buNone/>
+            </a:pPr>
+            <a:r>
+              <a:rPr lang="en-US" sz="1300" dirty="0">
+                <a:solidFill>
+                  <a:srgbClr val="E8EEF7"/>
+                </a:solidFill>
+                <a:latin typeface="Calibri" pitchFamily="34" charset="0"/>
+                <a:ea typeface="Calibri" pitchFamily="34" charset="-122"/>
+                <a:cs typeface="Calibri" pitchFamily="34" charset="-120"/>
+              </a:rPr>
+              <a:t>Quando a TI aprova o projeto de um curso novo, a MB recebe um e-mail com a identificação oficial no formato "Nome do curso - Nome do(a) formador(a) - Carga horária". Use exatamente esse nome na pasta do curso — ele também dá nome ao pacote ZIP dos materiais.</a:t>
+            </a:r>
+            <a:endParaRPr lang="en-US" sz="1300" dirty="0"/>
+          </a:p>
+        </p:txBody>
+      </p:sp>
+      <p:sp>
+        <p:nvSpPr>
+          <p:cNvPr id="16" name="Text 14"/>
           <p:cNvSpPr/>
           <p:nvPr/>
         </p:nvSpPr>
@@ -3349,7 +4865,7 @@
       </p:sp>
       <p:sp>
         <p:nvSpPr>
-          <p:cNvPr id="14" name="Text 12"/>
+          <p:cNvPr id="17" name="Text 15"/>
           <p:cNvSpPr/>
           <p:nvPr/>
         </p:nvSpPr>
@@ -3380,7 +4896,7 @@
                 <a:ea typeface="Calibri" pitchFamily="34" charset="-122"/>
                 <a:cs typeface="Calibri" pitchFamily="34" charset="-120"/>
               </a:rPr>
-              <a:t>3 / 9</a:t>
+              <a:t>3 / 11</a:t>
             </a:r>
             <a:endParaRPr lang="en-US" sz="950" dirty="0"/>
           </a:p>
@@ -3504,12 +5020,12 @@
         </p:nvSpPr>
         <p:spPr>
           <a:xfrm>
-            <a:off x="1824685" y="1463040"/>
-            <a:ext cx="8603590" cy="3383280"/>
+            <a:off x="2430475" y="1463040"/>
+            <a:ext cx="7392010" cy="2926080"/>
           </a:xfrm>
           <a:prstGeom prst="roundRect">
             <a:avLst>
-              <a:gd name="adj" fmla="val 2432"/>
+              <a:gd name="adj" fmla="val 2813"/>
             </a:avLst>
           </a:prstGeom>
           <a:solidFill>
@@ -3539,8 +5055,8 @@
         </p:blipFill>
         <p:spPr>
           <a:xfrm>
-            <a:off x="1934413" y="1572768"/>
-            <a:ext cx="8384134" cy="3163824"/>
+            <a:off x="2540203" y="1572768"/>
+            <a:ext cx="7172554" cy="2706624"/>
           </a:xfrm>
           <a:prstGeom prst="rect">
             <a:avLst/>
@@ -3575,7 +5091,7 @@
               <a:buNone/>
             </a:pPr>
             <a:r>
-              <a:rPr lang="en-US" sz="1350" dirty="0">
+              <a:rPr lang="en-US" sz="1350" b="1" dirty="0">
                 <a:solidFill>
                   <a:srgbClr val="E8EEF7"/>
                 </a:solidFill>
@@ -3583,7 +5099,7 @@
                 <a:ea typeface="Calibri" pitchFamily="34" charset="-122"/>
                 <a:cs typeface="Calibri" pitchFamily="34" charset="-120"/>
               </a:rPr>
-              <a:t>Os cursos da MB estão nas colunas </a:t>
+              <a:t>O quadro mostra todas as etapas do fluxo. </a:t>
             </a:r>
             <a:pPr indent="0" marL="0">
               <a:lnSpc>
@@ -3592,66 +5108,15 @@
               <a:buNone/>
             </a:pPr>
             <a:r>
-              <a:rPr lang="en-US" sz="1350" b="1" dirty="0">
-                <a:solidFill>
-                  <a:srgbClr val="22D3EE"/>
-                </a:solidFill>
-                <a:latin typeface="Calibri" pitchFamily="34" charset="0"/>
-                <a:ea typeface="Calibri" pitchFamily="34" charset="-122"/>
-                <a:cs typeface="Calibri" pitchFamily="34" charset="-120"/>
-              </a:rPr>
-              <a:t>MB Estúdio </a:t>
-            </a:r>
-            <a:pPr indent="0" marL="0">
-              <a:lnSpc>
-                <a:spcPct val="115000"/>
-              </a:lnSpc>
-              <a:buNone/>
-            </a:pPr>
-            <a:r>
               <a:rPr lang="en-US" sz="1350" dirty="0">
                 <a:solidFill>
-                  <a:srgbClr val="E8EEF7"/>
-                </a:solidFill>
-                <a:latin typeface="Calibri" pitchFamily="34" charset="0"/>
-                <a:ea typeface="Calibri" pitchFamily="34" charset="-122"/>
-                <a:cs typeface="Calibri" pitchFamily="34" charset="-120"/>
-              </a:rPr>
-              <a:t>(Enviado para Inserção, Em Inserção, Inserido) e </a:t>
-            </a:r>
-            <a:pPr indent="0" marL="0">
-              <a:lnSpc>
-                <a:spcPct val="115000"/>
-              </a:lnSpc>
-              <a:buNone/>
-            </a:pPr>
-            <a:r>
-              <a:rPr lang="en-US" sz="1350" b="1" dirty="0">
-                <a:solidFill>
-                  <a:srgbClr val="22D3EE"/>
-                </a:solidFill>
-                <a:latin typeface="Calibri" pitchFamily="34" charset="0"/>
-                <a:ea typeface="Calibri" pitchFamily="34" charset="-122"/>
-                <a:cs typeface="Calibri" pitchFamily="34" charset="-120"/>
-              </a:rPr>
-              <a:t>Publicado </a:t>
-            </a:r>
-            <a:pPr indent="0" marL="0">
-              <a:lnSpc>
-                <a:spcPct val="115000"/>
-              </a:lnSpc>
-              <a:buNone/>
-            </a:pPr>
-            <a:r>
-              <a:rPr lang="en-US" sz="1350" dirty="0">
-                <a:solidFill>
-                  <a:srgbClr val="E8EEF7"/>
-                </a:solidFill>
-                <a:latin typeface="Calibri" pitchFamily="34" charset="0"/>
-                <a:ea typeface="Calibri" pitchFamily="34" charset="-122"/>
-                <a:cs typeface="Calibri" pitchFamily="34" charset="-120"/>
-              </a:rPr>
-              <a:t>(Pronto para Publicação). Clique em Abrir no cartão para entrar na página do curso.</a:t>
+                  <a:srgbClr val="8BAAC8"/>
+                </a:solidFill>
+                <a:latin typeface="Calibri" pitchFamily="34" charset="0"/>
+                <a:ea typeface="Calibri" pitchFamily="34" charset="-122"/>
+                <a:cs typeface="Calibri" pitchFamily="34" charset="-120"/>
+              </a:rPr>
+              <a:t>Role para a direita até as colunas MB Estúdio e Publicado — é onde ficam os cursos que aguardam a MB. Clique em Abrir no cartão para entrar na página do curso.</a:t>
             </a:r>
             <a:endParaRPr lang="en-US" sz="1350" dirty="0"/>
           </a:p>
@@ -3729,7 +5194,7 @@
                 <a:ea typeface="Calibri" pitchFamily="34" charset="-122"/>
                 <a:cs typeface="Calibri" pitchFamily="34" charset="-120"/>
               </a:rPr>
-              <a:t>4 / 9</a:t>
+              <a:t>4 / 11</a:t>
             </a:r>
             <a:endParaRPr lang="en-US" sz="950" dirty="0"/>
           </a:p>
@@ -4161,7 +5626,7 @@
                 <a:ea typeface="Calibri" pitchFamily="34" charset="-122"/>
                 <a:cs typeface="Calibri" pitchFamily="34" charset="-120"/>
               </a:rPr>
-              <a:t>Observação é opcional. Clique em </a:t>
+              <a:t>Clique em </a:t>
             </a:r>
             <a:pPr indent="0" marL="0">
               <a:buNone/>
@@ -4290,7 +5755,7 @@
         <p:spPr>
           <a:xfrm>
             <a:off x="841248" y="4206240"/>
-            <a:ext cx="3291840" cy="621792"/>
+            <a:ext cx="3383280" cy="621792"/>
           </a:xfrm>
           <a:prstGeom prst="rect">
             <a:avLst/>
@@ -4328,8 +5793,8 @@
         </p:nvSpPr>
         <p:spPr>
           <a:xfrm>
-            <a:off x="4206240" y="4206240"/>
-            <a:ext cx="2103120" cy="621792"/>
+            <a:off x="4297680" y="4206240"/>
+            <a:ext cx="1920240" cy="621792"/>
           </a:xfrm>
           <a:prstGeom prst="rect">
             <a:avLst/>
@@ -4353,7 +5818,7 @@
                 <a:ea typeface="Calibri" pitchFamily="34" charset="-122"/>
                 <a:cs typeface="Calibri" pitchFamily="34" charset="-120"/>
               </a:rPr>
-              <a:t>"Começamos a montar o curso"</a:t>
+              <a:t>Começamos a montar</a:t>
             </a:r>
             <a:endParaRPr lang="en-US" sz="1050" dirty="0"/>
           </a:p>
@@ -4454,7 +5919,7 @@
         <p:spPr>
           <a:xfrm>
             <a:off x="841248" y="4919472"/>
-            <a:ext cx="3291840" cy="621792"/>
+            <a:ext cx="3383280" cy="621792"/>
           </a:xfrm>
           <a:prstGeom prst="rect">
             <a:avLst/>
@@ -4492,8 +5957,8 @@
         </p:nvSpPr>
         <p:spPr>
           <a:xfrm>
-            <a:off x="4206240" y="4919472"/>
-            <a:ext cx="2103120" cy="621792"/>
+            <a:off x="4297680" y="4919472"/>
+            <a:ext cx="1920240" cy="621792"/>
           </a:xfrm>
           <a:prstGeom prst="rect">
             <a:avLst/>
@@ -4517,7 +5982,7 @@
                 <a:ea typeface="Calibri" pitchFamily="34" charset="-122"/>
                 <a:cs typeface="Calibri" pitchFamily="34" charset="-120"/>
               </a:rPr>
-              <a:t>"Curso montado — formador pode conferir"</a:t>
+              <a:t>Formador pode conferir</a:t>
             </a:r>
             <a:endParaRPr lang="en-US" sz="1050" dirty="0"/>
           </a:p>
@@ -4618,7 +6083,7 @@
         <p:spPr>
           <a:xfrm>
             <a:off x="841248" y="5632704"/>
-            <a:ext cx="3291840" cy="621792"/>
+            <a:ext cx="3383280" cy="621792"/>
           </a:xfrm>
           <a:prstGeom prst="rect">
             <a:avLst/>
@@ -4656,8 +6121,8 @@
         </p:nvSpPr>
         <p:spPr>
           <a:xfrm>
-            <a:off x="4206240" y="5632704"/>
-            <a:ext cx="2103120" cy="621792"/>
+            <a:off x="4297680" y="5632704"/>
+            <a:ext cx="1920240" cy="621792"/>
           </a:xfrm>
           <a:prstGeom prst="rect">
             <a:avLst/>
@@ -4681,7 +6146,7 @@
                 <a:ea typeface="Calibri" pitchFamily="34" charset="-122"/>
                 <a:cs typeface="Calibri" pitchFamily="34" charset="-120"/>
               </a:rPr>
-              <a:t>"Curso publicado na plataforma"</a:t>
+              <a:t>Curso no ar</a:t>
             </a:r>
             <a:endParaRPr lang="en-US" sz="1050" dirty="0"/>
           </a:p>
@@ -4695,7 +6160,7 @@
         </p:nvSpPr>
         <p:spPr>
           <a:xfrm>
-            <a:off x="6766560" y="1920240"/>
+            <a:off x="6766560" y="1783080"/>
             <a:ext cx="4846320" cy="1281218"/>
           </a:xfrm>
           <a:prstGeom prst="roundRect">
@@ -4730,7 +6195,7 @@
         </p:blipFill>
         <p:spPr>
           <a:xfrm>
-            <a:off x="6876288" y="2029968"/>
+            <a:off x="6876288" y="1892808"/>
             <a:ext cx="4626864" cy="1061762"/>
           </a:xfrm>
           <a:prstGeom prst="rect">
@@ -4810,7 +6275,7 @@
                 <a:ea typeface="Calibri" pitchFamily="34" charset="-122"/>
                 <a:cs typeface="Calibri" pitchFamily="34" charset="-120"/>
               </a:rPr>
-              <a:t>5 / 9</a:t>
+              <a:t>5 / 11</a:t>
             </a:r>
             <a:endParaRPr lang="en-US" sz="950" dirty="0"/>
           </a:p>
@@ -5195,7 +6660,7 @@
                 <a:ea typeface="Calibri" pitchFamily="34" charset="-122"/>
                 <a:cs typeface="Calibri" pitchFamily="34" charset="-120"/>
               </a:rPr>
-              <a:t>Extraia o arquivo baixado (botão direito → Extrair tudo);</a:t>
+              <a:t>Extraia o arquivo (botão direito → Extrair tudo);</a:t>
             </a:r>
             <a:endParaRPr lang="en-US" sz="1400" dirty="0"/>
           </a:p>
@@ -5308,11 +6773,11 @@
         <p:spPr>
           <a:xfrm>
             <a:off x="6400800" y="1554480"/>
-            <a:ext cx="5212080" cy="4023360"/>
+            <a:ext cx="5212080" cy="3200400"/>
           </a:xfrm>
           <a:prstGeom prst="roundRect">
             <a:avLst>
-              <a:gd name="adj" fmla="val 2045"/>
+              <a:gd name="adj" fmla="val 2571"/>
             </a:avLst>
           </a:prstGeom>
           <a:solidFill>
@@ -5421,7 +6886,7 @@
                 <a:ea typeface="Courier New" pitchFamily="34" charset="-122"/>
                 <a:cs typeface="Courier New" pitchFamily="34" charset="-120"/>
               </a:rPr>
-              <a:t>  01 - Apresentação do(s) Formador(es) - ....pdf</a:t>
+              <a:t>  01 - Apresentação do(s) Formador(es)</a:t>
             </a:r>
             <a:endParaRPr lang="en-US" sz="1150" dirty="0"/>
           </a:p>
@@ -5441,7 +6906,7 @@
                 <a:ea typeface="Courier New" pitchFamily="34" charset="-122"/>
                 <a:cs typeface="Courier New" pitchFamily="34" charset="-120"/>
               </a:rPr>
-              <a:t>  02 - Apresentação do Curso - ....pdf</a:t>
+              <a:t>  02 - Apresentação do Curso</a:t>
             </a:r>
             <a:endParaRPr lang="en-US" sz="1150" dirty="0"/>
           </a:p>
@@ -5461,7 +6926,7 @@
                 <a:ea typeface="Courier New" pitchFamily="34" charset="-122"/>
                 <a:cs typeface="Courier New" pitchFamily="34" charset="-120"/>
               </a:rPr>
-              <a:t>  03 - Objetivos - ....pdf</a:t>
+              <a:t>  03 - Objetivos</a:t>
             </a:r>
             <a:endParaRPr lang="en-US" sz="1150" dirty="0"/>
           </a:p>
@@ -5501,7 +6966,7 @@
                 <a:ea typeface="Courier New" pitchFamily="34" charset="-122"/>
                 <a:cs typeface="Courier New" pitchFamily="34" charset="-120"/>
               </a:rPr>
-              <a:t>  01 - Apresentação do Módulo - ....pdf</a:t>
+              <a:t>  01 - Apresentação do Módulo</a:t>
             </a:r>
             <a:endParaRPr lang="en-US" sz="1150" dirty="0"/>
           </a:p>
@@ -5521,7 +6986,7 @@
                 <a:ea typeface="Courier New" pitchFamily="34" charset="-122"/>
                 <a:cs typeface="Courier New" pitchFamily="34" charset="-120"/>
               </a:rPr>
-              <a:t>  02 - Slide - ....pptx</a:t>
+              <a:t>  02 - Slide</a:t>
             </a:r>
             <a:endParaRPr lang="en-US" sz="1150" dirty="0"/>
           </a:p>
@@ -5541,7 +7006,7 @@
                 <a:ea typeface="Courier New" pitchFamily="34" charset="-122"/>
                 <a:cs typeface="Courier New" pitchFamily="34" charset="-120"/>
               </a:rPr>
-              <a:t>  03 - Vídeo - ....mp4</a:t>
+              <a:t>  03 - Vídeo</a:t>
             </a:r>
             <a:endParaRPr lang="en-US" sz="1150" dirty="0"/>
           </a:p>
@@ -5561,7 +7026,7 @@
                 <a:ea typeface="Courier New" pitchFamily="34" charset="-122"/>
                 <a:cs typeface="Courier New" pitchFamily="34" charset="-120"/>
               </a:rPr>
-              <a:t>  04 - Anexo - ....zip</a:t>
+              <a:t>  04 - Anexo</a:t>
             </a:r>
             <a:endParaRPr lang="en-US" sz="1150" dirty="0"/>
           </a:p>
@@ -5609,9 +7074,6 @@
           <a:lstStyle/>
           <a:p>
             <a:pPr indent="0" marL="0">
-              <a:lnSpc>
-                <a:spcPct val="110000"/>
-              </a:lnSpc>
               <a:buNone/>
             </a:pPr>
             <a:r>
@@ -5623,7 +7085,7 @@
                 <a:ea typeface="Calibri" pitchFamily="34" charset="-122"/>
                 <a:cs typeface="Calibri" pitchFamily="34" charset="-120"/>
               </a:rPr>
-              <a:t>Categorias declaradas "sem material" pelo formador não existem no pacote — não é erro.</a:t>
+              <a:t>O arquivo ZIP recebe a identificação oficial do curso.</a:t>
             </a:r>
             <a:endParaRPr lang="en-US" sz="1200" dirty="0"/>
           </a:p>
@@ -5701,7 +7163,7 @@
                 <a:ea typeface="Calibri" pitchFamily="34" charset="-122"/>
                 <a:cs typeface="Calibri" pitchFamily="34" charset="-120"/>
               </a:rPr>
-              <a:t>6 / 9</a:t>
+              <a:t>6 / 11</a:t>
             </a:r>
             <a:endParaRPr lang="en-US" sz="950" dirty="0"/>
           </a:p>
@@ -5772,7 +7234,7 @@
                 <a:ea typeface="Calibri" pitchFamily="34" charset="-122"/>
                 <a:cs typeface="Calibri" pitchFamily="34" charset="-120"/>
               </a:rPr>
-              <a:t>PASSO A PASSO</a:t>
+              <a:t>VÍDEOS</a:t>
             </a:r>
             <a:endParaRPr lang="en-US" sz="1200" dirty="0"/>
           </a:p>
@@ -5811,7 +7273,7 @@
                 <a:ea typeface="Calibri" pitchFamily="34" charset="-122"/>
                 <a:cs typeface="Calibri" pitchFamily="34" charset="-120"/>
               </a:rPr>
-              <a:t>5. A lista na tela segue a mesma ordem</a:t>
+              <a:t>5. Disponibilizar um vídeo para análise</a:t>
             </a:r>
             <a:endParaRPr lang="en-US" sz="3000" dirty="0"/>
           </a:p>
@@ -5825,12 +7287,544 @@
         </p:nvSpPr>
         <p:spPr>
           <a:xfrm>
-            <a:off x="695950" y="1508760"/>
-            <a:ext cx="10861060" cy="3108960"/>
+            <a:off x="640080" y="1783080"/>
+            <a:ext cx="310896" cy="310896"/>
+          </a:xfrm>
+          <a:prstGeom prst="ellipse">
+            <a:avLst/>
+          </a:prstGeom>
+          <a:solidFill>
+            <a:srgbClr val="22D3EE"/>
+          </a:solidFill>
+          <a:ln/>
+        </p:spPr>
+      </p:sp>
+      <p:sp>
+        <p:nvSpPr>
+          <p:cNvPr id="5" name="Text 3"/>
+          <p:cNvSpPr/>
+          <p:nvPr/>
+        </p:nvSpPr>
+        <p:spPr>
+          <a:xfrm>
+            <a:off x="640080" y="1783080"/>
+            <a:ext cx="310896" cy="310896"/>
+          </a:xfrm>
+          <a:prstGeom prst="rect">
+            <a:avLst/>
+          </a:prstGeom>
+          <a:noFill/>
+          <a:ln/>
+        </p:spPr>
+        <p:txBody>
+          <a:bodyPr wrap="square" lIns="0" tIns="0" rIns="0" bIns="0" rtlCol="0" anchor="ctr"/>
+          <a:lstStyle/>
+          <a:p>
+            <a:pPr algn="ctr" indent="0" marL="0">
+              <a:buNone/>
+            </a:pPr>
+            <a:r>
+              <a:rPr lang="en-US" sz="1300" b="1" dirty="0">
+                <a:solidFill>
+                  <a:srgbClr val="07101F"/>
+                </a:solidFill>
+                <a:latin typeface="Calibri" pitchFamily="34" charset="0"/>
+                <a:ea typeface="Calibri" pitchFamily="34" charset="-122"/>
+                <a:cs typeface="Calibri" pitchFamily="34" charset="-120"/>
+              </a:rPr>
+              <a:t>1</a:t>
+            </a:r>
+            <a:endParaRPr lang="en-US" sz="1300" dirty="0"/>
+          </a:p>
+        </p:txBody>
+      </p:sp>
+      <p:sp>
+        <p:nvSpPr>
+          <p:cNvPr id="6" name="Text 4"/>
+          <p:cNvSpPr/>
+          <p:nvPr/>
+        </p:nvSpPr>
+        <p:spPr>
+          <a:xfrm>
+            <a:off x="1097280" y="1737360"/>
+            <a:ext cx="5212080" cy="841248"/>
+          </a:xfrm>
+          <a:prstGeom prst="rect">
+            <a:avLst/>
+          </a:prstGeom>
+          <a:noFill/>
+          <a:ln/>
+        </p:spPr>
+        <p:txBody>
+          <a:bodyPr wrap="square" lIns="0" tIns="0" rIns="0" bIns="0" rtlCol="0" anchor="t"/>
+          <a:lstStyle/>
+          <a:p>
+            <a:pPr indent="0" marL="0">
+              <a:buNone/>
+            </a:pPr>
+            <a:r>
+              <a:rPr lang="en-US" sz="1400" dirty="0">
+                <a:solidFill>
+                  <a:srgbClr val="E8EEF7"/>
+                </a:solidFill>
+                <a:latin typeface="Calibri" pitchFamily="34" charset="0"/>
+                <a:ea typeface="Calibri" pitchFamily="34" charset="-122"/>
+                <a:cs typeface="Calibri" pitchFamily="34" charset="-120"/>
+              </a:rPr>
+              <a:t>Abra o curso e clique em </a:t>
+            </a:r>
+            <a:pPr indent="0" marL="0">
+              <a:buNone/>
+            </a:pPr>
+            <a:r>
+              <a:rPr lang="en-US" sz="1400" b="1" dirty="0">
+                <a:solidFill>
+                  <a:srgbClr val="22D3EE"/>
+                </a:solidFill>
+                <a:latin typeface="Calibri" pitchFamily="34" charset="0"/>
+                <a:ea typeface="Calibri" pitchFamily="34" charset="-122"/>
+                <a:cs typeface="Calibri" pitchFamily="34" charset="-120"/>
+              </a:rPr>
+              <a:t>🎬 Vídeos</a:t>
+            </a:r>
+            <a:pPr indent="0" marL="0">
+              <a:buNone/>
+            </a:pPr>
+            <a:r>
+              <a:rPr lang="en-US" sz="1400" dirty="0">
+                <a:solidFill>
+                  <a:srgbClr val="E8EEF7"/>
+                </a:solidFill>
+                <a:latin typeface="Calibri" pitchFamily="34" charset="0"/>
+                <a:ea typeface="Calibri" pitchFamily="34" charset="-122"/>
+                <a:cs typeface="Calibri" pitchFamily="34" charset="-120"/>
+              </a:rPr>
+              <a:t>;</a:t>
+            </a:r>
+            <a:endParaRPr lang="en-US" sz="1400" dirty="0"/>
+          </a:p>
+        </p:txBody>
+      </p:sp>
+      <p:sp>
+        <p:nvSpPr>
+          <p:cNvPr id="7" name="Shape 5"/>
+          <p:cNvSpPr/>
+          <p:nvPr/>
+        </p:nvSpPr>
+        <p:spPr>
+          <a:xfrm>
+            <a:off x="640080" y="2624328"/>
+            <a:ext cx="310896" cy="310896"/>
+          </a:xfrm>
+          <a:prstGeom prst="ellipse">
+            <a:avLst/>
+          </a:prstGeom>
+          <a:solidFill>
+            <a:srgbClr val="22D3EE"/>
+          </a:solidFill>
+          <a:ln/>
+        </p:spPr>
+      </p:sp>
+      <p:sp>
+        <p:nvSpPr>
+          <p:cNvPr id="8" name="Text 6"/>
+          <p:cNvSpPr/>
+          <p:nvPr/>
+        </p:nvSpPr>
+        <p:spPr>
+          <a:xfrm>
+            <a:off x="640080" y="2624328"/>
+            <a:ext cx="310896" cy="310896"/>
+          </a:xfrm>
+          <a:prstGeom prst="rect">
+            <a:avLst/>
+          </a:prstGeom>
+          <a:noFill/>
+          <a:ln/>
+        </p:spPr>
+        <p:txBody>
+          <a:bodyPr wrap="square" lIns="0" tIns="0" rIns="0" bIns="0" rtlCol="0" anchor="ctr"/>
+          <a:lstStyle/>
+          <a:p>
+            <a:pPr algn="ctr" indent="0" marL="0">
+              <a:buNone/>
+            </a:pPr>
+            <a:r>
+              <a:rPr lang="en-US" sz="1300" b="1" dirty="0">
+                <a:solidFill>
+                  <a:srgbClr val="07101F"/>
+                </a:solidFill>
+                <a:latin typeface="Calibri" pitchFamily="34" charset="0"/>
+                <a:ea typeface="Calibri" pitchFamily="34" charset="-122"/>
+                <a:cs typeface="Calibri" pitchFamily="34" charset="-120"/>
+              </a:rPr>
+              <a:t>2</a:t>
+            </a:r>
+            <a:endParaRPr lang="en-US" sz="1300" dirty="0"/>
+          </a:p>
+        </p:txBody>
+      </p:sp>
+      <p:sp>
+        <p:nvSpPr>
+          <p:cNvPr id="9" name="Text 7"/>
+          <p:cNvSpPr/>
+          <p:nvPr/>
+        </p:nvSpPr>
+        <p:spPr>
+          <a:xfrm>
+            <a:off x="1097280" y="2578608"/>
+            <a:ext cx="5212080" cy="841248"/>
+          </a:xfrm>
+          <a:prstGeom prst="rect">
+            <a:avLst/>
+          </a:prstGeom>
+          <a:noFill/>
+          <a:ln/>
+        </p:spPr>
+        <p:txBody>
+          <a:bodyPr wrap="square" lIns="0" tIns="0" rIns="0" bIns="0" rtlCol="0" anchor="t"/>
+          <a:lstStyle/>
+          <a:p>
+            <a:pPr indent="0" marL="0">
+              <a:buNone/>
+            </a:pPr>
+            <a:r>
+              <a:rPr lang="en-US" sz="1400" dirty="0">
+                <a:solidFill>
+                  <a:srgbClr val="E8EEF7"/>
+                </a:solidFill>
+                <a:latin typeface="Calibri" pitchFamily="34" charset="0"/>
+                <a:ea typeface="Calibri" pitchFamily="34" charset="-122"/>
+                <a:cs typeface="Calibri" pitchFamily="34" charset="-120"/>
+              </a:rPr>
+              <a:t>Informe </a:t>
+            </a:r>
+            <a:pPr indent="0" marL="0">
+              <a:buNone/>
+            </a:pPr>
+            <a:r>
+              <a:rPr lang="en-US" sz="1400" b="1" dirty="0">
+                <a:solidFill>
+                  <a:srgbClr val="E8EEF7"/>
+                </a:solidFill>
+                <a:latin typeface="Calibri" pitchFamily="34" charset="0"/>
+                <a:ea typeface="Calibri" pitchFamily="34" charset="-122"/>
+                <a:cs typeface="Calibri" pitchFamily="34" charset="-120"/>
+              </a:rPr>
+              <a:t>título</a:t>
+            </a:r>
+            <a:pPr indent="0" marL="0">
+              <a:buNone/>
+            </a:pPr>
+            <a:r>
+              <a:rPr lang="en-US" sz="1400" dirty="0">
+                <a:solidFill>
+                  <a:srgbClr val="E8EEF7"/>
+                </a:solidFill>
+                <a:latin typeface="Calibri" pitchFamily="34" charset="0"/>
+                <a:ea typeface="Calibri" pitchFamily="34" charset="-122"/>
+                <a:cs typeface="Calibri" pitchFamily="34" charset="-120"/>
+              </a:rPr>
+              <a:t> e </a:t>
+            </a:r>
+            <a:pPr indent="0" marL="0">
+              <a:buNone/>
+            </a:pPr>
+            <a:r>
+              <a:rPr lang="en-US" sz="1400" b="1" dirty="0">
+                <a:solidFill>
+                  <a:srgbClr val="E8EEF7"/>
+                </a:solidFill>
+                <a:latin typeface="Calibri" pitchFamily="34" charset="0"/>
+                <a:ea typeface="Calibri" pitchFamily="34" charset="-122"/>
+                <a:cs typeface="Calibri" pitchFamily="34" charset="-120"/>
+              </a:rPr>
+              <a:t>módulo</a:t>
+            </a:r>
+            <a:pPr indent="0" marL="0">
+              <a:buNone/>
+            </a:pPr>
+            <a:r>
+              <a:rPr lang="en-US" sz="1400" dirty="0">
+                <a:solidFill>
+                  <a:srgbClr val="E8EEF7"/>
+                </a:solidFill>
+                <a:latin typeface="Calibri" pitchFamily="34" charset="0"/>
+                <a:ea typeface="Calibri" pitchFamily="34" charset="-122"/>
+                <a:cs typeface="Calibri" pitchFamily="34" charset="-120"/>
+              </a:rPr>
+              <a:t>;</a:t>
+            </a:r>
+            <a:endParaRPr lang="en-US" sz="1400" dirty="0"/>
+          </a:p>
+        </p:txBody>
+      </p:sp>
+      <p:sp>
+        <p:nvSpPr>
+          <p:cNvPr id="10" name="Shape 8"/>
+          <p:cNvSpPr/>
+          <p:nvPr/>
+        </p:nvSpPr>
+        <p:spPr>
+          <a:xfrm>
+            <a:off x="640080" y="3465576"/>
+            <a:ext cx="310896" cy="310896"/>
+          </a:xfrm>
+          <a:prstGeom prst="ellipse">
+            <a:avLst/>
+          </a:prstGeom>
+          <a:solidFill>
+            <a:srgbClr val="22D3EE"/>
+          </a:solidFill>
+          <a:ln/>
+        </p:spPr>
+      </p:sp>
+      <p:sp>
+        <p:nvSpPr>
+          <p:cNvPr id="11" name="Text 9"/>
+          <p:cNvSpPr/>
+          <p:nvPr/>
+        </p:nvSpPr>
+        <p:spPr>
+          <a:xfrm>
+            <a:off x="640080" y="3465576"/>
+            <a:ext cx="310896" cy="310896"/>
+          </a:xfrm>
+          <a:prstGeom prst="rect">
+            <a:avLst/>
+          </a:prstGeom>
+          <a:noFill/>
+          <a:ln/>
+        </p:spPr>
+        <p:txBody>
+          <a:bodyPr wrap="square" lIns="0" tIns="0" rIns="0" bIns="0" rtlCol="0" anchor="ctr"/>
+          <a:lstStyle/>
+          <a:p>
+            <a:pPr algn="ctr" indent="0" marL="0">
+              <a:buNone/>
+            </a:pPr>
+            <a:r>
+              <a:rPr lang="en-US" sz="1300" b="1" dirty="0">
+                <a:solidFill>
+                  <a:srgbClr val="07101F"/>
+                </a:solidFill>
+                <a:latin typeface="Calibri" pitchFamily="34" charset="0"/>
+                <a:ea typeface="Calibri" pitchFamily="34" charset="-122"/>
+                <a:cs typeface="Calibri" pitchFamily="34" charset="-120"/>
+              </a:rPr>
+              <a:t>3</a:t>
+            </a:r>
+            <a:endParaRPr lang="en-US" sz="1300" dirty="0"/>
+          </a:p>
+        </p:txBody>
+      </p:sp>
+      <p:sp>
+        <p:nvSpPr>
+          <p:cNvPr id="12" name="Text 10"/>
+          <p:cNvSpPr/>
+          <p:nvPr/>
+        </p:nvSpPr>
+        <p:spPr>
+          <a:xfrm>
+            <a:off x="1097280" y="3419856"/>
+            <a:ext cx="5212080" cy="841248"/>
+          </a:xfrm>
+          <a:prstGeom prst="rect">
+            <a:avLst/>
+          </a:prstGeom>
+          <a:noFill/>
+          <a:ln/>
+        </p:spPr>
+        <p:txBody>
+          <a:bodyPr wrap="square" lIns="0" tIns="0" rIns="0" bIns="0" rtlCol="0" anchor="t"/>
+          <a:lstStyle/>
+          <a:p>
+            <a:pPr indent="0" marL="0">
+              <a:buNone/>
+            </a:pPr>
+            <a:r>
+              <a:rPr lang="en-US" sz="1400" dirty="0">
+                <a:solidFill>
+                  <a:srgbClr val="E8EEF7"/>
+                </a:solidFill>
+                <a:latin typeface="Calibri" pitchFamily="34" charset="0"/>
+                <a:ea typeface="Calibri" pitchFamily="34" charset="-122"/>
+                <a:cs typeface="Calibri" pitchFamily="34" charset="-120"/>
+              </a:rPr>
+              <a:t>Escreva a </a:t>
+            </a:r>
+            <a:pPr indent="0" marL="0">
+              <a:buNone/>
+            </a:pPr>
+            <a:r>
+              <a:rPr lang="en-US" sz="1400" b="1" dirty="0">
+                <a:solidFill>
+                  <a:srgbClr val="FBBF24"/>
+                </a:solidFill>
+                <a:latin typeface="Calibri" pitchFamily="34" charset="0"/>
+                <a:ea typeface="Calibri" pitchFamily="34" charset="-122"/>
+                <a:cs typeface="Calibri" pitchFamily="34" charset="-120"/>
+              </a:rPr>
+              <a:t>descrição do vídeo</a:t>
+            </a:r>
+            <a:pPr indent="0" marL="0">
+              <a:buNone/>
+            </a:pPr>
+            <a:r>
+              <a:rPr lang="en-US" sz="1400" dirty="0">
+                <a:solidFill>
+                  <a:srgbClr val="E8EEF7"/>
+                </a:solidFill>
+                <a:latin typeface="Calibri" pitchFamily="34" charset="0"/>
+                <a:ea typeface="Calibri" pitchFamily="34" charset="-122"/>
+                <a:cs typeface="Calibri" pitchFamily="34" charset="-120"/>
+              </a:rPr>
+              <a:t> — obrigatória: esse texto vai no e-mail do(a) formador(a);</a:t>
+            </a:r>
+            <a:endParaRPr lang="en-US" sz="1400" dirty="0"/>
+          </a:p>
+        </p:txBody>
+      </p:sp>
+      <p:sp>
+        <p:nvSpPr>
+          <p:cNvPr id="13" name="Shape 11"/>
+          <p:cNvSpPr/>
+          <p:nvPr/>
+        </p:nvSpPr>
+        <p:spPr>
+          <a:xfrm>
+            <a:off x="640080" y="4306824"/>
+            <a:ext cx="310896" cy="310896"/>
+          </a:xfrm>
+          <a:prstGeom prst="ellipse">
+            <a:avLst/>
+          </a:prstGeom>
+          <a:solidFill>
+            <a:srgbClr val="22D3EE"/>
+          </a:solidFill>
+          <a:ln/>
+        </p:spPr>
+      </p:sp>
+      <p:sp>
+        <p:nvSpPr>
+          <p:cNvPr id="14" name="Text 12"/>
+          <p:cNvSpPr/>
+          <p:nvPr/>
+        </p:nvSpPr>
+        <p:spPr>
+          <a:xfrm>
+            <a:off x="640080" y="4306824"/>
+            <a:ext cx="310896" cy="310896"/>
+          </a:xfrm>
+          <a:prstGeom prst="rect">
+            <a:avLst/>
+          </a:prstGeom>
+          <a:noFill/>
+          <a:ln/>
+        </p:spPr>
+        <p:txBody>
+          <a:bodyPr wrap="square" lIns="0" tIns="0" rIns="0" bIns="0" rtlCol="0" anchor="ctr"/>
+          <a:lstStyle/>
+          <a:p>
+            <a:pPr algn="ctr" indent="0" marL="0">
+              <a:buNone/>
+            </a:pPr>
+            <a:r>
+              <a:rPr lang="en-US" sz="1300" b="1" dirty="0">
+                <a:solidFill>
+                  <a:srgbClr val="07101F"/>
+                </a:solidFill>
+                <a:latin typeface="Calibri" pitchFamily="34" charset="0"/>
+                <a:ea typeface="Calibri" pitchFamily="34" charset="-122"/>
+                <a:cs typeface="Calibri" pitchFamily="34" charset="-120"/>
+              </a:rPr>
+              <a:t>4</a:t>
+            </a:r>
+            <a:endParaRPr lang="en-US" sz="1300" dirty="0"/>
+          </a:p>
+        </p:txBody>
+      </p:sp>
+      <p:sp>
+        <p:nvSpPr>
+          <p:cNvPr id="15" name="Text 13"/>
+          <p:cNvSpPr/>
+          <p:nvPr/>
+        </p:nvSpPr>
+        <p:spPr>
+          <a:xfrm>
+            <a:off x="1097280" y="4261104"/>
+            <a:ext cx="5212080" cy="841248"/>
+          </a:xfrm>
+          <a:prstGeom prst="rect">
+            <a:avLst/>
+          </a:prstGeom>
+          <a:noFill/>
+          <a:ln/>
+        </p:spPr>
+        <p:txBody>
+          <a:bodyPr wrap="square" lIns="0" tIns="0" rIns="0" bIns="0" rtlCol="0" anchor="t"/>
+          <a:lstStyle/>
+          <a:p>
+            <a:pPr indent="0" marL="0">
+              <a:buNone/>
+            </a:pPr>
+            <a:r>
+              <a:rPr lang="en-US" sz="1400" dirty="0">
+                <a:solidFill>
+                  <a:srgbClr val="E8EEF7"/>
+                </a:solidFill>
+                <a:latin typeface="Calibri" pitchFamily="34" charset="0"/>
+                <a:ea typeface="Calibri" pitchFamily="34" charset="-122"/>
+                <a:cs typeface="Calibri" pitchFamily="34" charset="-120"/>
+              </a:rPr>
+              <a:t>Anexe o MP4 (até 512MB) e clique em </a:t>
+            </a:r>
+            <a:pPr indent="0" marL="0">
+              <a:buNone/>
+            </a:pPr>
+            <a:r>
+              <a:rPr lang="en-US" sz="1400" b="1" dirty="0">
+                <a:solidFill>
+                  <a:srgbClr val="22D3EE"/>
+                </a:solidFill>
+                <a:latin typeface="Calibri" pitchFamily="34" charset="0"/>
+                <a:ea typeface="Calibri" pitchFamily="34" charset="-122"/>
+                <a:cs typeface="Calibri" pitchFamily="34" charset="-120"/>
+              </a:rPr>
+              <a:t>Disponibilizar para análise</a:t>
+            </a:r>
+            <a:pPr indent="0" marL="0">
+              <a:buNone/>
+            </a:pPr>
+            <a:r>
+              <a:rPr lang="en-US" sz="1400" dirty="0">
+                <a:solidFill>
+                  <a:srgbClr val="E8EEF7"/>
+                </a:solidFill>
+                <a:latin typeface="Calibri" pitchFamily="34" charset="0"/>
+                <a:ea typeface="Calibri" pitchFamily="34" charset="-122"/>
+                <a:cs typeface="Calibri" pitchFamily="34" charset="-120"/>
+              </a:rPr>
+              <a:t>.</a:t>
+            </a:r>
+            <a:endParaRPr lang="en-US" sz="1400" dirty="0"/>
+          </a:p>
+        </p:txBody>
+      </p:sp>
+      <p:sp>
+        <p:nvSpPr>
+          <p:cNvPr id="16" name="Shape 14"/>
+          <p:cNvSpPr/>
+          <p:nvPr/>
+        </p:nvSpPr>
+        <p:spPr>
+          <a:xfrm>
+            <a:off x="640080" y="5257800"/>
+            <a:ext cx="5669280" cy="914400"/>
           </a:xfrm>
           <a:prstGeom prst="roundRect">
             <a:avLst>
-              <a:gd name="adj" fmla="val 2647"/>
+              <a:gd name="adj" fmla="val 9000"/>
             </a:avLst>
           </a:prstGeom>
           <a:solidFill>
@@ -5844,9 +7838,117 @@
           </a:ln>
         </p:spPr>
       </p:sp>
+      <p:sp>
+        <p:nvSpPr>
+          <p:cNvPr id="17" name="Text 15"/>
+          <p:cNvSpPr/>
+          <p:nvPr/>
+        </p:nvSpPr>
+        <p:spPr>
+          <a:xfrm>
+            <a:off x="841248" y="5404104"/>
+            <a:ext cx="5266944" cy="329184"/>
+          </a:xfrm>
+          <a:prstGeom prst="rect">
+            <a:avLst/>
+          </a:prstGeom>
+          <a:noFill/>
+          <a:ln/>
+        </p:spPr>
+        <p:txBody>
+          <a:bodyPr wrap="square" lIns="0" tIns="0" rIns="0" bIns="0" rtlCol="0" anchor="ctr"/>
+          <a:lstStyle/>
+          <a:p>
+            <a:pPr indent="0" marL="0">
+              <a:buNone/>
+            </a:pPr>
+            <a:r>
+              <a:rPr lang="en-US" sz="1400" b="1" dirty="0">
+                <a:solidFill>
+                  <a:srgbClr val="22D3EE"/>
+                </a:solidFill>
+                <a:latin typeface="Calibri" pitchFamily="34" charset="0"/>
+                <a:ea typeface="Calibri" pitchFamily="34" charset="-122"/>
+                <a:cs typeface="Calibri" pitchFamily="34" charset="-120"/>
+              </a:rPr>
+              <a:t>O formador é avisado na hora</a:t>
+            </a:r>
+            <a:endParaRPr lang="en-US" sz="1400" dirty="0"/>
+          </a:p>
+        </p:txBody>
+      </p:sp>
+      <p:sp>
+        <p:nvSpPr>
+          <p:cNvPr id="18" name="Text 16"/>
+          <p:cNvSpPr/>
+          <p:nvPr/>
+        </p:nvSpPr>
+        <p:spPr>
+          <a:xfrm>
+            <a:off x="841248" y="5733288"/>
+            <a:ext cx="5266944" cy="310896"/>
+          </a:xfrm>
+          <a:prstGeom prst="rect">
+            <a:avLst/>
+          </a:prstGeom>
+          <a:noFill/>
+          <a:ln/>
+        </p:spPr>
+        <p:txBody>
+          <a:bodyPr wrap="square" lIns="0" tIns="0" rIns="0" bIns="0" rtlCol="0" anchor="t"/>
+          <a:lstStyle/>
+          <a:p>
+            <a:pPr indent="0" marL="0">
+              <a:lnSpc>
+                <a:spcPct val="112000"/>
+              </a:lnSpc>
+              <a:buNone/>
+            </a:pPr>
+            <a:r>
+              <a:rPr lang="en-US" sz="1250" dirty="0">
+                <a:solidFill>
+                  <a:srgbClr val="E8EEF7"/>
+                </a:solidFill>
+                <a:latin typeface="Calibri" pitchFamily="34" charset="0"/>
+                <a:ea typeface="Calibri" pitchFamily="34" charset="-122"/>
+                <a:cs typeface="Calibri" pitchFamily="34" charset="-120"/>
+              </a:rPr>
+              <a:t>Ele recebe a descrição que você escreveu e o link do vídeo, já liberado na plataforma.</a:t>
+            </a:r>
+            <a:endParaRPr lang="en-US" sz="1250" dirty="0"/>
+          </a:p>
+        </p:txBody>
+      </p:sp>
+      <p:sp>
+        <p:nvSpPr>
+          <p:cNvPr id="19" name="Shape 17"/>
+          <p:cNvSpPr/>
+          <p:nvPr/>
+        </p:nvSpPr>
+        <p:spPr>
+          <a:xfrm>
+            <a:off x="7574520" y="1737360"/>
+            <a:ext cx="3138960" cy="4480560"/>
+          </a:xfrm>
+          <a:prstGeom prst="roundRect">
+            <a:avLst>
+              <a:gd name="adj" fmla="val 2622"/>
+            </a:avLst>
+          </a:prstGeom>
+          <a:solidFill>
+            <a:srgbClr val="10233F"/>
+          </a:solidFill>
+          <a:ln w="12700">
+            <a:solidFill>
+              <a:srgbClr val="1D3A5F"/>
+            </a:solidFill>
+            <a:prstDash val="solid"/>
+          </a:ln>
+        </p:spPr>
+      </p:sp>
       <p:pic>
         <p:nvPicPr>
-          <p:cNvPr id="5" name="Image 0" descr="/home/user/AutoriaSCS-Scrum-cursos/docs/tutoriais/img/mb-arquivos.png">    </p:cNvPr>
+          <p:cNvPr id="20" name="Image 0" descr="/home/user/AutoriaSCS-Scrum-cursos/docs/tutoriais/img/mb-publica-video.png">    </p:cNvPr>
           <p:cNvPicPr>
             <a:picLocks noChangeAspect="1"/>
           </p:cNvPicPr>
@@ -5860,8 +7962,8 @@
         </p:blipFill>
         <p:spPr>
           <a:xfrm>
-            <a:off x="805678" y="1618488"/>
-            <a:ext cx="10641604" cy="2889504"/>
+            <a:off x="7684248" y="1847088"/>
+            <a:ext cx="2919504" cy="4261104"/>
           </a:xfrm>
           <a:prstGeom prst="rect">
             <a:avLst/>
@@ -5870,66 +7972,7 @@
       </p:pic>
       <p:sp>
         <p:nvSpPr>
-          <p:cNvPr id="6" name="Text 3"/>
-          <p:cNvSpPr/>
-          <p:nvPr/>
-        </p:nvSpPr>
-        <p:spPr>
-          <a:xfrm>
-            <a:off x="640080" y="4846320"/>
-            <a:ext cx="10972800" cy="914400"/>
-          </a:xfrm>
-          <a:prstGeom prst="rect">
-            <a:avLst/>
-          </a:prstGeom>
-          <a:noFill/>
-          <a:ln/>
-        </p:spPr>
-        <p:txBody>
-          <a:bodyPr wrap="square" lIns="0" tIns="0" rIns="0" bIns="0" rtlCol="0" anchor="ctr"/>
-          <a:lstStyle/>
-          <a:p>
-            <a:pPr indent="0" marL="0">
-              <a:lnSpc>
-                <a:spcPct val="115000"/>
-              </a:lnSpc>
-              <a:buNone/>
-            </a:pPr>
-            <a:r>
-              <a:rPr lang="en-US" sz="1350" b="1" dirty="0">
-                <a:solidFill>
-                  <a:srgbClr val="22D3EE"/>
-                </a:solidFill>
-                <a:latin typeface="Calibri" pitchFamily="34" charset="0"/>
-                <a:ea typeface="Calibri" pitchFamily="34" charset="-122"/>
-                <a:cs typeface="Calibri" pitchFamily="34" charset="-120"/>
-              </a:rPr>
-              <a:t>Para conferência: </a:t>
-            </a:r>
-            <a:pPr indent="0" marL="0">
-              <a:lnSpc>
-                <a:spcPct val="115000"/>
-              </a:lnSpc>
-              <a:buNone/>
-            </a:pPr>
-            <a:r>
-              <a:rPr lang="en-US" sz="1350" dirty="0">
-                <a:solidFill>
-                  <a:srgbClr val="E8EEF7"/>
-                </a:solidFill>
-                <a:latin typeface="Calibri" pitchFamily="34" charset="0"/>
-                <a:ea typeface="Calibri" pitchFamily="34" charset="-122"/>
-                <a:cs typeface="Calibri" pitchFamily="34" charset="-120"/>
-              </a:rPr>
-              <a:t>módulo Geral primeiro, depois Módulo 1, 2...; dentro de cada módulo, a sequência oficial das categorias. Vídeos brutos e materiais acima de 25MB ficam na seção Links Externos (Google Drive), na mesma página.</a:t>
-            </a:r>
-            <a:endParaRPr lang="en-US" sz="1350" dirty="0"/>
-          </a:p>
-        </p:txBody>
-      </p:sp>
-      <p:sp>
-        <p:nvSpPr>
-          <p:cNvPr id="7" name="Text 4"/>
+          <p:cNvPr id="21" name="Text 18"/>
           <p:cNvSpPr/>
           <p:nvPr/>
         </p:nvSpPr>
@@ -5968,7 +8011,7 @@
       </p:sp>
       <p:sp>
         <p:nvSpPr>
-          <p:cNvPr id="8" name="Text 5"/>
+          <p:cNvPr id="22" name="Text 19"/>
           <p:cNvSpPr/>
           <p:nvPr/>
         </p:nvSpPr>
@@ -5999,7 +8042,7 @@
                 <a:ea typeface="Calibri" pitchFamily="34" charset="-122"/>
                 <a:cs typeface="Calibri" pitchFamily="34" charset="-120"/>
               </a:rPr>
-              <a:t>7 / 9</a:t>
+              <a:t>7 / 11</a:t>
             </a:r>
             <a:endParaRPr lang="en-US" sz="950" dirty="0"/>
           </a:p>
@@ -6070,7 +8113,7 @@
                 <a:ea typeface="Calibri" pitchFamily="34" charset="-122"/>
                 <a:cs typeface="Calibri" pitchFamily="34" charset="-120"/>
               </a:rPr>
-              <a:t>BOM SABER</a:t>
+              <a:t>VÍDEOS</a:t>
             </a:r>
             <a:endParaRPr lang="en-US" sz="1200" dirty="0"/>
           </a:p>
@@ -6109,7 +8152,7 @@
                 <a:ea typeface="Calibri" pitchFamily="34" charset="-122"/>
                 <a:cs typeface="Calibri" pitchFamily="34" charset="-120"/>
               </a:rPr>
-              <a:t>6. O que a conta MB não faz (de propósito)</a:t>
+              <a:t>6. Tratar os apontamentos do formador</a:t>
             </a:r>
             <a:endParaRPr lang="en-US" sz="3000" dirty="0"/>
           </a:p>
@@ -6123,12 +8166,12 @@
         </p:nvSpPr>
         <p:spPr>
           <a:xfrm>
-            <a:off x="640080" y="1737360"/>
-            <a:ext cx="3566160" cy="2377440"/>
+            <a:off x="2398644" y="1463040"/>
+            <a:ext cx="3249433" cy="4480560"/>
           </a:xfrm>
           <a:prstGeom prst="roundRect">
             <a:avLst>
-              <a:gd name="adj" fmla="val 3462"/>
+              <a:gd name="adj" fmla="val 2533"/>
             </a:avLst>
           </a:prstGeom>
           <a:solidFill>
@@ -6142,97 +8185,40 @@
           </a:ln>
         </p:spPr>
       </p:sp>
-      <p:sp>
-        <p:nvSpPr>
-          <p:cNvPr id="5" name="Text 3"/>
-          <p:cNvSpPr/>
-          <p:nvPr/>
-        </p:nvSpPr>
-        <p:spPr>
-          <a:xfrm>
-            <a:off x="841248" y="1883664"/>
-            <a:ext cx="3163824" cy="329184"/>
-          </a:xfrm>
-          <a:prstGeom prst="rect">
-            <a:avLst/>
-          </a:prstGeom>
-          <a:noFill/>
-          <a:ln/>
-        </p:spPr>
-        <p:txBody>
-          <a:bodyPr wrap="square" lIns="0" tIns="0" rIns="0" bIns="0" rtlCol="0" anchor="ctr"/>
-          <a:lstStyle/>
-          <a:p>
-            <a:pPr indent="0" marL="0">
-              <a:buNone/>
-            </a:pPr>
-            <a:r>
-              <a:rPr lang="en-US" sz="1400" b="1" dirty="0">
-                <a:solidFill>
-                  <a:srgbClr val="22D3EE"/>
-                </a:solidFill>
-                <a:latin typeface="Calibri" pitchFamily="34" charset="0"/>
-                <a:ea typeface="Calibri" pitchFamily="34" charset="-122"/>
-                <a:cs typeface="Calibri" pitchFamily="34" charset="-120"/>
-              </a:rPr>
-              <a:t>Não envia arquivos</a:t>
-            </a:r>
-            <a:endParaRPr lang="en-US" sz="1400" dirty="0"/>
-          </a:p>
-        </p:txBody>
-      </p:sp>
-      <p:sp>
-        <p:nvSpPr>
-          <p:cNvPr id="6" name="Text 4"/>
-          <p:cNvSpPr/>
-          <p:nvPr/>
-        </p:nvSpPr>
-        <p:spPr>
-          <a:xfrm>
-            <a:off x="841248" y="2212848"/>
-            <a:ext cx="3163824" cy="1773936"/>
-          </a:xfrm>
-          <a:prstGeom prst="rect">
-            <a:avLst/>
-          </a:prstGeom>
-          <a:noFill/>
-          <a:ln/>
-        </p:spPr>
-        <p:txBody>
-          <a:bodyPr wrap="square" lIns="0" tIns="0" rIns="0" bIns="0" rtlCol="0" anchor="t"/>
-          <a:lstStyle/>
-          <a:p>
-            <a:pPr indent="0" marL="0">
-              <a:lnSpc>
-                <a:spcPct val="112000"/>
-              </a:lnSpc>
-              <a:buNone/>
-            </a:pPr>
-            <a:r>
-              <a:rPr lang="en-US" sz="1300" dirty="0">
-                <a:solidFill>
-                  <a:srgbClr val="E8EEF7"/>
-                </a:solidFill>
-                <a:latin typeface="Calibri" pitchFamily="34" charset="0"/>
-                <a:ea typeface="Calibri" pitchFamily="34" charset="-122"/>
-                <a:cs typeface="Calibri" pitchFamily="34" charset="-120"/>
-              </a:rPr>
-              <a:t>O formulário de upload nem aparece — o envio de materiais é exclusivo do formador.</a:t>
-            </a:r>
-            <a:endParaRPr lang="en-US" sz="1300" dirty="0"/>
-          </a:p>
-        </p:txBody>
-      </p:sp>
-      <p:sp>
-        <p:nvSpPr>
-          <p:cNvPr id="7" name="Shape 5"/>
-          <p:cNvSpPr/>
-          <p:nvPr/>
-        </p:nvSpPr>
-        <p:spPr>
-          <a:xfrm>
-            <a:off x="4389120" y="1737360"/>
-            <a:ext cx="3566160" cy="2377440"/>
+      <p:pic>
+        <p:nvPicPr>
+          <p:cNvPr id="5" name="Image 0" descr="/home/user/AutoriaSCS-Scrum-cursos/docs/tutoriais/img/video-apontamentos.png">    </p:cNvPr>
+          <p:cNvPicPr>
+            <a:picLocks noChangeAspect="1"/>
+          </p:cNvPicPr>
+          <p:nvPr/>
+        </p:nvPicPr>
+        <p:blipFill>
+          <a:blip r:embed="rId1"/>
+          <a:stretch>
+            <a:fillRect/>
+          </a:stretch>
+        </p:blipFill>
+        <p:spPr>
+          <a:xfrm>
+            <a:off x="2508372" y="1572768"/>
+            <a:ext cx="3029977" cy="4261104"/>
+          </a:xfrm>
+          <a:prstGeom prst="rect">
+            <a:avLst/>
+          </a:prstGeom>
+        </p:spPr>
+      </p:pic>
+      <p:sp>
+        <p:nvSpPr>
+          <p:cNvPr id="6" name="Shape 3"/>
+          <p:cNvSpPr/>
+          <p:nvPr/>
+        </p:nvSpPr>
+        <p:spPr>
+          <a:xfrm>
+            <a:off x="7680960" y="1463040"/>
+            <a:ext cx="3931920" cy="2377440"/>
           </a:xfrm>
           <a:prstGeom prst="roundRect">
             <a:avLst>
@@ -6252,14 +8238,14 @@
       </p:sp>
       <p:sp>
         <p:nvSpPr>
-          <p:cNvPr id="8" name="Text 6"/>
-          <p:cNvSpPr/>
-          <p:nvPr/>
-        </p:nvSpPr>
-        <p:spPr>
-          <a:xfrm>
-            <a:off x="4590288" y="1883664"/>
-            <a:ext cx="3163824" cy="329184"/>
+          <p:cNvPr id="7" name="Text 4"/>
+          <p:cNvSpPr/>
+          <p:nvPr/>
+        </p:nvSpPr>
+        <p:spPr>
+          <a:xfrm>
+            <a:off x="7882128" y="1609344"/>
+            <a:ext cx="3529584" cy="329184"/>
           </a:xfrm>
           <a:prstGeom prst="rect">
             <a:avLst/>
@@ -6283,7 +8269,7 @@
                 <a:ea typeface="Calibri" pitchFamily="34" charset="-122"/>
                 <a:cs typeface="Calibri" pitchFamily="34" charset="-120"/>
               </a:rPr>
-              <a:t>Não baixa arquivo avulso</a:t>
+              <a:t>O que cada apontamento traz</a:t>
             </a:r>
             <a:endParaRPr lang="en-US" sz="1400" dirty="0"/>
           </a:p>
@@ -6291,14 +8277,14 @@
       </p:sp>
       <p:sp>
         <p:nvSpPr>
-          <p:cNvPr id="9" name="Text 7"/>
-          <p:cNvSpPr/>
-          <p:nvPr/>
-        </p:nvSpPr>
-        <p:spPr>
-          <a:xfrm>
-            <a:off x="4590288" y="2212848"/>
-            <a:ext cx="3163824" cy="1773936"/>
+          <p:cNvPr id="8" name="Text 5"/>
+          <p:cNvSpPr/>
+          <p:nvPr/>
+        </p:nvSpPr>
+        <p:spPr>
+          <a:xfrm>
+            <a:off x="7882128" y="1938528"/>
+            <a:ext cx="3529584" cy="1773936"/>
           </a:xfrm>
           <a:prstGeom prst="rect">
             <a:avLst/>
@@ -6317,7 +8303,7 @@
               <a:buNone/>
             </a:pPr>
             <a:r>
-              <a:rPr lang="en-US" sz="1300" dirty="0">
+              <a:rPr lang="en-US" sz="1250" dirty="0">
                 <a:solidFill>
                   <a:srgbClr val="E8EEF7"/>
                 </a:solidFill>
@@ -6325,26 +8311,86 @@
                 <a:ea typeface="Calibri" pitchFamily="34" charset="-122"/>
                 <a:cs typeface="Calibri" pitchFamily="34" charset="-120"/>
               </a:rPr>
-              <a:t>O material desce sempre completo, pelo ZIP — é o que garante a ordem e a conferência.</a:t>
-            </a:r>
-            <a:endParaRPr lang="en-US" sz="1300" dirty="0"/>
-          </a:p>
-        </p:txBody>
-      </p:sp>
-      <p:sp>
-        <p:nvSpPr>
-          <p:cNvPr id="10" name="Shape 8"/>
-          <p:cNvSpPr/>
-          <p:nvPr/>
-        </p:nvSpPr>
-        <p:spPr>
-          <a:xfrm>
-            <a:off x="8138160" y="1737360"/>
-            <a:ext cx="3474720" cy="2377440"/>
+              <a:t>• O momento exato (minuto, segundo e frame)</a:t>
+            </a:r>
+            <a:endParaRPr lang="en-US" sz="1250" dirty="0"/>
+          </a:p>
+          <a:p>
+            <a:pPr indent="0" marL="0">
+              <a:lnSpc>
+                <a:spcPct val="112000"/>
+              </a:lnSpc>
+              <a:buNone/>
+            </a:pPr>
+            <a:r>
+              <a:rPr lang="en-US" sz="1250" dirty="0">
+                <a:solidFill>
+                  <a:srgbClr val="E8EEF7"/>
+                </a:solidFill>
+                <a:latin typeface="Calibri" pitchFamily="34" charset="0"/>
+                <a:ea typeface="Calibri" pitchFamily="34" charset="-122"/>
+                <a:cs typeface="Calibri" pitchFamily="34" charset="-120"/>
+              </a:rPr>
+              <a:t>• A classificação do problema</a:t>
+            </a:r>
+            <a:endParaRPr lang="en-US" sz="1250" dirty="0"/>
+          </a:p>
+          <a:p>
+            <a:pPr indent="0" marL="0">
+              <a:lnSpc>
+                <a:spcPct val="112000"/>
+              </a:lnSpc>
+              <a:buNone/>
+            </a:pPr>
+            <a:r>
+              <a:rPr lang="en-US" sz="1250" dirty="0">
+                <a:solidFill>
+                  <a:srgbClr val="E8EEF7"/>
+                </a:solidFill>
+                <a:latin typeface="Calibri" pitchFamily="34" charset="0"/>
+                <a:ea typeface="Calibri" pitchFamily="34" charset="-122"/>
+                <a:cs typeface="Calibri" pitchFamily="34" charset="-120"/>
+              </a:rPr>
+              <a:t>• A orientação de correção</a:t>
+            </a:r>
+            <a:endParaRPr lang="en-US" sz="1250" dirty="0"/>
+          </a:p>
+          <a:p>
+            <a:pPr indent="0" marL="0">
+              <a:lnSpc>
+                <a:spcPct val="112000"/>
+              </a:lnSpc>
+              <a:buNone/>
+            </a:pPr>
+            <a:r>
+              <a:rPr lang="en-US" sz="1250" dirty="0">
+                <a:solidFill>
+                  <a:srgbClr val="E8EEF7"/>
+                </a:solidFill>
+                <a:latin typeface="Calibri" pitchFamily="34" charset="0"/>
+                <a:ea typeface="Calibri" pitchFamily="34" charset="-122"/>
+                <a:cs typeface="Calibri" pitchFamily="34" charset="-120"/>
+              </a:rPr>
+              <a:t>• Muitas vezes, a captura do frame</a:t>
+            </a:r>
+            <a:endParaRPr lang="en-US" sz="1250" dirty="0"/>
+          </a:p>
+        </p:txBody>
+      </p:sp>
+      <p:sp>
+        <p:nvSpPr>
+          <p:cNvPr id="9" name="Shape 6"/>
+          <p:cNvSpPr/>
+          <p:nvPr/>
+        </p:nvSpPr>
+        <p:spPr>
+          <a:xfrm>
+            <a:off x="7680960" y="4023360"/>
+            <a:ext cx="3931920" cy="1920240"/>
           </a:xfrm>
           <a:prstGeom prst="roundRect">
             <a:avLst>
-              <a:gd name="adj" fmla="val 3462"/>
+              <a:gd name="adj" fmla="val 4286"/>
             </a:avLst>
           </a:prstGeom>
           <a:solidFill>
@@ -6360,14 +8406,14 @@
       </p:sp>
       <p:sp>
         <p:nvSpPr>
-          <p:cNvPr id="11" name="Text 9"/>
-          <p:cNvSpPr/>
-          <p:nvPr/>
-        </p:nvSpPr>
-        <p:spPr>
-          <a:xfrm>
-            <a:off x="8339328" y="1883664"/>
-            <a:ext cx="3072384" cy="329184"/>
+          <p:cNvPr id="10" name="Text 7"/>
+          <p:cNvSpPr/>
+          <p:nvPr/>
+        </p:nvSpPr>
+        <p:spPr>
+          <a:xfrm>
+            <a:off x="7882128" y="4169664"/>
+            <a:ext cx="3529584" cy="329184"/>
           </a:xfrm>
           <a:prstGeom prst="rect">
             <a:avLst/>
@@ -6391,7 +8437,7 @@
                 <a:ea typeface="Calibri" pitchFamily="34" charset="-122"/>
                 <a:cs typeface="Calibri" pitchFamily="34" charset="-120"/>
               </a:rPr>
-              <a:t>Não edita cursos</a:t>
+              <a:t>O que a MB faz</a:t>
             </a:r>
             <a:endParaRPr lang="en-US" sz="1400" dirty="0"/>
           </a:p>
@@ -6399,14 +8445,14 @@
       </p:sp>
       <p:sp>
         <p:nvSpPr>
-          <p:cNvPr id="12" name="Text 10"/>
-          <p:cNvSpPr/>
-          <p:nvPr/>
-        </p:nvSpPr>
-        <p:spPr>
-          <a:xfrm>
-            <a:off x="8339328" y="2212848"/>
-            <a:ext cx="3072384" cy="1773936"/>
+          <p:cNvPr id="11" name="Text 8"/>
+          <p:cNvSpPr/>
+          <p:nvPr/>
+        </p:nvSpPr>
+        <p:spPr>
+          <a:xfrm>
+            <a:off x="7882128" y="4498848"/>
+            <a:ext cx="3529584" cy="1316736"/>
           </a:xfrm>
           <a:prstGeom prst="rect">
             <a:avLst/>
@@ -6425,7 +8471,7 @@
               <a:buNone/>
             </a:pPr>
             <a:r>
-              <a:rPr lang="en-US" sz="1300" dirty="0">
+              <a:rPr lang="en-US" sz="1250" dirty="0">
                 <a:solidFill>
                   <a:srgbClr val="E8EEF7"/>
                 </a:solidFill>
@@ -6433,98 +8479,10 @@
                 <a:ea typeface="Calibri" pitchFamily="34" charset="-122"/>
                 <a:cs typeface="Calibri" pitchFamily="34" charset="-120"/>
               </a:rPr>
-              <a:t>Produção é do formador; revisão e apontamentos são da TI. A MB movimenta apenas as suas fases.</a:t>
-            </a:r>
-            <a:endParaRPr lang="en-US" sz="1300" dirty="0"/>
-          </a:p>
-        </p:txBody>
-      </p:sp>
-      <p:sp>
-        <p:nvSpPr>
-          <p:cNvPr id="13" name="Shape 11"/>
-          <p:cNvSpPr/>
-          <p:nvPr/>
-        </p:nvSpPr>
-        <p:spPr>
-          <a:xfrm>
-            <a:off x="640080" y="4480560"/>
-            <a:ext cx="10972800" cy="1463040"/>
-          </a:xfrm>
-          <a:prstGeom prst="roundRect">
-            <a:avLst>
-              <a:gd name="adj" fmla="val 5625"/>
-            </a:avLst>
-          </a:prstGeom>
-          <a:solidFill>
-            <a:srgbClr val="10233F"/>
-          </a:solidFill>
-          <a:ln w="12700">
-            <a:solidFill>
-              <a:srgbClr val="1D3A5F"/>
-            </a:solidFill>
-            <a:prstDash val="solid"/>
-          </a:ln>
-        </p:spPr>
-      </p:sp>
-      <p:sp>
-        <p:nvSpPr>
-          <p:cNvPr id="14" name="Text 12"/>
-          <p:cNvSpPr/>
-          <p:nvPr/>
-        </p:nvSpPr>
-        <p:spPr>
-          <a:xfrm>
-            <a:off x="841248" y="4626864"/>
-            <a:ext cx="10570464" cy="329184"/>
-          </a:xfrm>
-          <a:prstGeom prst="rect">
-            <a:avLst/>
-          </a:prstGeom>
-          <a:noFill/>
-          <a:ln/>
-        </p:spPr>
-        <p:txBody>
-          <a:bodyPr wrap="square" lIns="0" tIns="0" rIns="0" bIns="0" rtlCol="0" anchor="ctr"/>
-          <a:lstStyle/>
-          <a:p>
-            <a:pPr indent="0" marL="0">
-              <a:buNone/>
-            </a:pPr>
-            <a:r>
-              <a:rPr lang="en-US" sz="1400" b="1" dirty="0">
-                <a:solidFill>
-                  <a:srgbClr val="22D3EE"/>
-                </a:solidFill>
-                <a:latin typeface="Calibri" pitchFamily="34" charset="0"/>
-                <a:ea typeface="Calibri" pitchFamily="34" charset="-122"/>
-                <a:cs typeface="Calibri" pitchFamily="34" charset="-120"/>
-              </a:rPr>
-              <a:t>Por quê?</a:t>
-            </a:r>
-            <a:endParaRPr lang="en-US" sz="1400" dirty="0"/>
-          </a:p>
-        </p:txBody>
-      </p:sp>
-      <p:sp>
-        <p:nvSpPr>
-          <p:cNvPr id="15" name="Text 13"/>
-          <p:cNvSpPr/>
-          <p:nvPr/>
-        </p:nvSpPr>
-        <p:spPr>
-          <a:xfrm>
-            <a:off x="841248" y="4956048"/>
-            <a:ext cx="10570464" cy="859536"/>
-          </a:xfrm>
-          <a:prstGeom prst="rect">
-            <a:avLst/>
-          </a:prstGeom>
-          <a:noFill/>
-          <a:ln/>
-        </p:spPr>
-        <p:txBody>
-          <a:bodyPr wrap="square" lIns="0" tIns="0" rIns="0" bIns="0" rtlCol="0" anchor="t"/>
-          <a:lstStyle/>
+              <a:t>• Responder na caixinha</a:t>
+            </a:r>
+            <a:endParaRPr lang="en-US" sz="1250" dirty="0"/>
+          </a:p>
           <a:p>
             <a:pPr indent="0" marL="0">
               <a:lnSpc>
@@ -6533,7 +8491,7 @@
               <a:buNone/>
             </a:pPr>
             <a:r>
-              <a:rPr lang="en-US" sz="1300" dirty="0">
+              <a:rPr lang="en-US" sz="1250" dirty="0">
                 <a:solidFill>
                   <a:srgbClr val="E8EEF7"/>
                 </a:solidFill>
@@ -6541,15 +8499,64 @@
                 <a:ea typeface="Calibri" pitchFamily="34" charset="-122"/>
                 <a:cs typeface="Calibri" pitchFamily="34" charset="-120"/>
               </a:rPr>
-              <a:t>Cada equipe opera só a sua parte do fluxo. Isso evita alterações acidentais e mantém a auditoria limpa: tudo o que a MB faz (downloads e movimentações) fica registrado automaticamente.</a:t>
-            </a:r>
-            <a:endParaRPr lang="en-US" sz="1300" dirty="0"/>
-          </a:p>
-        </p:txBody>
-      </p:sp>
-      <p:sp>
-        <p:nvSpPr>
-          <p:cNvPr id="16" name="Text 14"/>
+              <a:t>• Marcar Em correção enquanto trabalha</a:t>
+            </a:r>
+            <a:endParaRPr lang="en-US" sz="1250" dirty="0"/>
+          </a:p>
+          <a:p>
+            <a:pPr indent="0" marL="0">
+              <a:lnSpc>
+                <a:spcPct val="112000"/>
+              </a:lnSpc>
+              <a:buNone/>
+            </a:pPr>
+            <a:r>
+              <a:rPr lang="en-US" sz="1250" dirty="0">
+                <a:solidFill>
+                  <a:srgbClr val="E8EEF7"/>
+                </a:solidFill>
+                <a:latin typeface="Calibri" pitchFamily="34" charset="0"/>
+                <a:ea typeface="Calibri" pitchFamily="34" charset="-122"/>
+                <a:cs typeface="Calibri" pitchFamily="34" charset="-120"/>
+              </a:rPr>
+              <a:t>• Marcar Corrigido ao concluir</a:t>
+            </a:r>
+            <a:endParaRPr lang="en-US" sz="1250" dirty="0"/>
+          </a:p>
+          <a:p>
+            <a:pPr indent="0" marL="0">
+              <a:lnSpc>
+                <a:spcPct val="112000"/>
+              </a:lnSpc>
+              <a:buNone/>
+            </a:pPr>
+            <a:endParaRPr lang="en-US" sz="1250" dirty="0"/>
+          </a:p>
+          <a:p>
+            <a:pPr indent="0" marL="0">
+              <a:lnSpc>
+                <a:spcPct val="112000"/>
+              </a:lnSpc>
+              <a:buNone/>
+            </a:pPr>
+            <a:r>
+              <a:rPr lang="en-US" sz="1250" dirty="0">
+                <a:solidFill>
+                  <a:srgbClr val="E8EEF7"/>
+                </a:solidFill>
+                <a:latin typeface="Calibri" pitchFamily="34" charset="0"/>
+                <a:ea typeface="Calibri" pitchFamily="34" charset="-122"/>
+                <a:cs typeface="Calibri" pitchFamily="34" charset="-120"/>
+              </a:rPr>
+              <a:t>A situação Aprovado é do formador.</a:t>
+            </a:r>
+            <a:endParaRPr lang="en-US" sz="1250" dirty="0"/>
+          </a:p>
+        </p:txBody>
+      </p:sp>
+      <p:sp>
+        <p:nvSpPr>
+          <p:cNvPr id="12" name="Text 9"/>
           <p:cNvSpPr/>
           <p:nvPr/>
         </p:nvSpPr>
@@ -6588,7 +8595,7 @@
       </p:sp>
       <p:sp>
         <p:nvSpPr>
-          <p:cNvPr id="17" name="Text 15"/>
+          <p:cNvPr id="13" name="Text 10"/>
           <p:cNvSpPr/>
           <p:nvPr/>
         </p:nvSpPr>
@@ -6619,7 +8626,7 @@
                 <a:ea typeface="Calibri" pitchFamily="34" charset="-122"/>
                 <a:cs typeface="Calibri" pitchFamily="34" charset="-120"/>
               </a:rPr>
-              <a:t>8 / 9</a:t>
+              <a:t>8 / 11</a:t>
             </a:r>
             <a:endParaRPr lang="en-US" sz="950" dirty="0"/>
           </a:p>
@@ -6639,7 +8646,7 @@
     <p:bg>
       <p:bgPr>
         <a:solidFill>
-          <a:srgbClr val="0D1C33"/>
+          <a:srgbClr val="0A1626"/>
         </a:solidFill>
       </p:bgPr>
     </p:bg>
@@ -6690,7 +8697,7 @@
                 <a:ea typeface="Calibri" pitchFamily="34" charset="-122"/>
                 <a:cs typeface="Calibri" pitchFamily="34" charset="-120"/>
               </a:rPr>
-              <a:t>SUPORTE</a:t>
+              <a:t>VÍDEOS</a:t>
             </a:r>
             <a:endParaRPr lang="en-US" sz="1200" dirty="0"/>
           </a:p>
@@ -6729,7 +8736,7 @@
                 <a:ea typeface="Calibri" pitchFamily="34" charset="-122"/>
                 <a:cs typeface="Calibri" pitchFamily="34" charset="-120"/>
               </a:rPr>
-              <a:t>Precisa de ajuda?</a:t>
+              <a:t>7. Enviar a versão corrigida</a:t>
             </a:r>
             <a:endParaRPr lang="en-US" sz="3000" dirty="0"/>
           </a:p>
@@ -6743,12 +8750,743 @@
         </p:nvSpPr>
         <p:spPr>
           <a:xfrm>
-            <a:off x="640080" y="1645920"/>
-            <a:ext cx="10881360" cy="914400"/>
+            <a:off x="640080" y="1783080"/>
+            <a:ext cx="310896" cy="310896"/>
+          </a:xfrm>
+          <a:prstGeom prst="ellipse">
+            <a:avLst/>
+          </a:prstGeom>
+          <a:solidFill>
+            <a:srgbClr val="22D3EE"/>
+          </a:solidFill>
+          <a:ln/>
+        </p:spPr>
+      </p:sp>
+      <p:sp>
+        <p:nvSpPr>
+          <p:cNvPr id="5" name="Text 3"/>
+          <p:cNvSpPr/>
+          <p:nvPr/>
+        </p:nvSpPr>
+        <p:spPr>
+          <a:xfrm>
+            <a:off x="640080" y="1783080"/>
+            <a:ext cx="310896" cy="310896"/>
+          </a:xfrm>
+          <a:prstGeom prst="rect">
+            <a:avLst/>
+          </a:prstGeom>
+          <a:noFill/>
+          <a:ln/>
+        </p:spPr>
+        <p:txBody>
+          <a:bodyPr wrap="square" lIns="0" tIns="0" rIns="0" bIns="0" rtlCol="0" anchor="ctr"/>
+          <a:lstStyle/>
+          <a:p>
+            <a:pPr algn="ctr" indent="0" marL="0">
+              <a:buNone/>
+            </a:pPr>
+            <a:r>
+              <a:rPr lang="en-US" sz="1300" b="1" dirty="0">
+                <a:solidFill>
+                  <a:srgbClr val="07101F"/>
+                </a:solidFill>
+                <a:latin typeface="Calibri" pitchFamily="34" charset="0"/>
+                <a:ea typeface="Calibri" pitchFamily="34" charset="-122"/>
+                <a:cs typeface="Calibri" pitchFamily="34" charset="-120"/>
+              </a:rPr>
+              <a:t>1</a:t>
+            </a:r>
+            <a:endParaRPr lang="en-US" sz="1300" dirty="0"/>
+          </a:p>
+        </p:txBody>
+      </p:sp>
+      <p:sp>
+        <p:nvSpPr>
+          <p:cNvPr id="6" name="Text 4"/>
+          <p:cNvSpPr/>
+          <p:nvPr/>
+        </p:nvSpPr>
+        <p:spPr>
+          <a:xfrm>
+            <a:off x="1097280" y="1737360"/>
+            <a:ext cx="10515600" cy="777240"/>
+          </a:xfrm>
+          <a:prstGeom prst="rect">
+            <a:avLst/>
+          </a:prstGeom>
+          <a:noFill/>
+          <a:ln/>
+        </p:spPr>
+        <p:txBody>
+          <a:bodyPr wrap="square" lIns="0" tIns="0" rIns="0" bIns="0" rtlCol="0" anchor="t"/>
+          <a:lstStyle/>
+          <a:p>
+            <a:pPr indent="0" marL="0">
+              <a:buNone/>
+            </a:pPr>
+            <a:r>
+              <a:rPr lang="en-US" sz="1400" dirty="0">
+                <a:solidFill>
+                  <a:srgbClr val="E8EEF7"/>
+                </a:solidFill>
+                <a:latin typeface="Calibri" pitchFamily="34" charset="0"/>
+                <a:ea typeface="Calibri" pitchFamily="34" charset="-122"/>
+                <a:cs typeface="Calibri" pitchFamily="34" charset="-120"/>
+              </a:rPr>
+              <a:t>No bloco </a:t>
+            </a:r>
+            <a:pPr indent="0" marL="0">
+              <a:buNone/>
+            </a:pPr>
+            <a:r>
+              <a:rPr lang="en-US" sz="1400" b="1" dirty="0">
+                <a:solidFill>
+                  <a:srgbClr val="22D3EE"/>
+                </a:solidFill>
+                <a:latin typeface="Calibri" pitchFamily="34" charset="0"/>
+                <a:ea typeface="Calibri" pitchFamily="34" charset="-122"/>
+                <a:cs typeface="Calibri" pitchFamily="34" charset="-120"/>
+              </a:rPr>
+              <a:t>Disponibilizar nova versão corrigida</a:t>
+            </a:r>
+            <a:pPr indent="0" marL="0">
+              <a:buNone/>
+            </a:pPr>
+            <a:r>
+              <a:rPr lang="en-US" sz="1400" dirty="0">
+                <a:solidFill>
+                  <a:srgbClr val="E8EEF7"/>
+                </a:solidFill>
+                <a:latin typeface="Calibri" pitchFamily="34" charset="0"/>
+                <a:ea typeface="Calibri" pitchFamily="34" charset="-122"/>
+                <a:cs typeface="Calibri" pitchFamily="34" charset="-120"/>
+              </a:rPr>
+              <a:t>, anexe o novo arquivo;</a:t>
+            </a:r>
+            <a:endParaRPr lang="en-US" sz="1400" dirty="0"/>
+          </a:p>
+        </p:txBody>
+      </p:sp>
+      <p:sp>
+        <p:nvSpPr>
+          <p:cNvPr id="7" name="Shape 5"/>
+          <p:cNvSpPr/>
+          <p:nvPr/>
+        </p:nvSpPr>
+        <p:spPr>
+          <a:xfrm>
+            <a:off x="640080" y="2560320"/>
+            <a:ext cx="310896" cy="310896"/>
+          </a:xfrm>
+          <a:prstGeom prst="ellipse">
+            <a:avLst/>
+          </a:prstGeom>
+          <a:solidFill>
+            <a:srgbClr val="22D3EE"/>
+          </a:solidFill>
+          <a:ln/>
+        </p:spPr>
+      </p:sp>
+      <p:sp>
+        <p:nvSpPr>
+          <p:cNvPr id="8" name="Text 6"/>
+          <p:cNvSpPr/>
+          <p:nvPr/>
+        </p:nvSpPr>
+        <p:spPr>
+          <a:xfrm>
+            <a:off x="640080" y="2560320"/>
+            <a:ext cx="310896" cy="310896"/>
+          </a:xfrm>
+          <a:prstGeom prst="rect">
+            <a:avLst/>
+          </a:prstGeom>
+          <a:noFill/>
+          <a:ln/>
+        </p:spPr>
+        <p:txBody>
+          <a:bodyPr wrap="square" lIns="0" tIns="0" rIns="0" bIns="0" rtlCol="0" anchor="ctr"/>
+          <a:lstStyle/>
+          <a:p>
+            <a:pPr algn="ctr" indent="0" marL="0">
+              <a:buNone/>
+            </a:pPr>
+            <a:r>
+              <a:rPr lang="en-US" sz="1300" b="1" dirty="0">
+                <a:solidFill>
+                  <a:srgbClr val="07101F"/>
+                </a:solidFill>
+                <a:latin typeface="Calibri" pitchFamily="34" charset="0"/>
+                <a:ea typeface="Calibri" pitchFamily="34" charset="-122"/>
+                <a:cs typeface="Calibri" pitchFamily="34" charset="-120"/>
+              </a:rPr>
+              <a:t>2</a:t>
+            </a:r>
+            <a:endParaRPr lang="en-US" sz="1300" dirty="0"/>
+          </a:p>
+        </p:txBody>
+      </p:sp>
+      <p:sp>
+        <p:nvSpPr>
+          <p:cNvPr id="9" name="Text 7"/>
+          <p:cNvSpPr/>
+          <p:nvPr/>
+        </p:nvSpPr>
+        <p:spPr>
+          <a:xfrm>
+            <a:off x="1097280" y="2514600"/>
+            <a:ext cx="10515600" cy="777240"/>
+          </a:xfrm>
+          <a:prstGeom prst="rect">
+            <a:avLst/>
+          </a:prstGeom>
+          <a:noFill/>
+          <a:ln/>
+        </p:spPr>
+        <p:txBody>
+          <a:bodyPr wrap="square" lIns="0" tIns="0" rIns="0" bIns="0" rtlCol="0" anchor="t"/>
+          <a:lstStyle/>
+          <a:p>
+            <a:pPr indent="0" marL="0">
+              <a:buNone/>
+            </a:pPr>
+            <a:r>
+              <a:rPr lang="en-US" sz="1400" dirty="0">
+                <a:solidFill>
+                  <a:srgbClr val="E8EEF7"/>
+                </a:solidFill>
+                <a:latin typeface="Calibri" pitchFamily="34" charset="0"/>
+                <a:ea typeface="Calibri" pitchFamily="34" charset="-122"/>
+                <a:cs typeface="Calibri" pitchFamily="34" charset="-120"/>
+              </a:rPr>
+              <a:t>Descreva no campo de observação </a:t>
+            </a:r>
+            <a:pPr indent="0" marL="0">
+              <a:buNone/>
+            </a:pPr>
+            <a:r>
+              <a:rPr lang="en-US" sz="1400" b="1" dirty="0">
+                <a:solidFill>
+                  <a:srgbClr val="E8EEF7"/>
+                </a:solidFill>
+                <a:latin typeface="Calibri" pitchFamily="34" charset="0"/>
+                <a:ea typeface="Calibri" pitchFamily="34" charset="-122"/>
+                <a:cs typeface="Calibri" pitchFamily="34" charset="-120"/>
+              </a:rPr>
+              <a:t>o que mudou</a:t>
+            </a:r>
+            <a:pPr indent="0" marL="0">
+              <a:buNone/>
+            </a:pPr>
+            <a:r>
+              <a:rPr lang="en-US" sz="1400" dirty="0">
+                <a:solidFill>
+                  <a:srgbClr val="E8EEF7"/>
+                </a:solidFill>
+                <a:latin typeface="Calibri" pitchFamily="34" charset="0"/>
+                <a:ea typeface="Calibri" pitchFamily="34" charset="-122"/>
+                <a:cs typeface="Calibri" pitchFamily="34" charset="-120"/>
+              </a:rPr>
+              <a:t> nesta versão;</a:t>
+            </a:r>
+            <a:endParaRPr lang="en-US" sz="1400" dirty="0"/>
+          </a:p>
+        </p:txBody>
+      </p:sp>
+      <p:sp>
+        <p:nvSpPr>
+          <p:cNvPr id="10" name="Shape 8"/>
+          <p:cNvSpPr/>
+          <p:nvPr/>
+        </p:nvSpPr>
+        <p:spPr>
+          <a:xfrm>
+            <a:off x="640080" y="3337560"/>
+            <a:ext cx="310896" cy="310896"/>
+          </a:xfrm>
+          <a:prstGeom prst="ellipse">
+            <a:avLst/>
+          </a:prstGeom>
+          <a:solidFill>
+            <a:srgbClr val="22D3EE"/>
+          </a:solidFill>
+          <a:ln/>
+        </p:spPr>
+      </p:sp>
+      <p:sp>
+        <p:nvSpPr>
+          <p:cNvPr id="11" name="Text 9"/>
+          <p:cNvSpPr/>
+          <p:nvPr/>
+        </p:nvSpPr>
+        <p:spPr>
+          <a:xfrm>
+            <a:off x="640080" y="3337560"/>
+            <a:ext cx="310896" cy="310896"/>
+          </a:xfrm>
+          <a:prstGeom prst="rect">
+            <a:avLst/>
+          </a:prstGeom>
+          <a:noFill/>
+          <a:ln/>
+        </p:spPr>
+        <p:txBody>
+          <a:bodyPr wrap="square" lIns="0" tIns="0" rIns="0" bIns="0" rtlCol="0" anchor="ctr"/>
+          <a:lstStyle/>
+          <a:p>
+            <a:pPr algn="ctr" indent="0" marL="0">
+              <a:buNone/>
+            </a:pPr>
+            <a:r>
+              <a:rPr lang="en-US" sz="1300" b="1" dirty="0">
+                <a:solidFill>
+                  <a:srgbClr val="07101F"/>
+                </a:solidFill>
+                <a:latin typeface="Calibri" pitchFamily="34" charset="0"/>
+                <a:ea typeface="Calibri" pitchFamily="34" charset="-122"/>
+                <a:cs typeface="Calibri" pitchFamily="34" charset="-120"/>
+              </a:rPr>
+              <a:t>3</a:t>
+            </a:r>
+            <a:endParaRPr lang="en-US" sz="1300" dirty="0"/>
+          </a:p>
+        </p:txBody>
+      </p:sp>
+      <p:sp>
+        <p:nvSpPr>
+          <p:cNvPr id="12" name="Text 10"/>
+          <p:cNvSpPr/>
+          <p:nvPr/>
+        </p:nvSpPr>
+        <p:spPr>
+          <a:xfrm>
+            <a:off x="1097280" y="3291840"/>
+            <a:ext cx="10515600" cy="777240"/>
+          </a:xfrm>
+          <a:prstGeom prst="rect">
+            <a:avLst/>
+          </a:prstGeom>
+          <a:noFill/>
+          <a:ln/>
+        </p:spPr>
+        <p:txBody>
+          <a:bodyPr wrap="square" lIns="0" tIns="0" rIns="0" bIns="0" rtlCol="0" anchor="t"/>
+          <a:lstStyle/>
+          <a:p>
+            <a:pPr indent="0" marL="0">
+              <a:buNone/>
+            </a:pPr>
+            <a:r>
+              <a:rPr lang="en-US" sz="1400" dirty="0">
+                <a:solidFill>
+                  <a:srgbClr val="E8EEF7"/>
+                </a:solidFill>
+                <a:latin typeface="Calibri" pitchFamily="34" charset="0"/>
+                <a:ea typeface="Calibri" pitchFamily="34" charset="-122"/>
+                <a:cs typeface="Calibri" pitchFamily="34" charset="-120"/>
+              </a:rPr>
+              <a:t>Envie: o sistema cria a v2 (v3, v4...), avisa o formador e reabre a análise.</a:t>
+            </a:r>
+            <a:endParaRPr lang="en-US" sz="1400" dirty="0"/>
+          </a:p>
+        </p:txBody>
+      </p:sp>
+      <p:sp>
+        <p:nvSpPr>
+          <p:cNvPr id="13" name="Shape 11"/>
+          <p:cNvSpPr/>
+          <p:nvPr/>
+        </p:nvSpPr>
+        <p:spPr>
+          <a:xfrm>
+            <a:off x="640080" y="4206240"/>
+            <a:ext cx="1221638" cy="402336"/>
           </a:xfrm>
           <a:prstGeom prst="roundRect">
             <a:avLst>
-              <a:gd name="adj" fmla="val 9000"/>
+              <a:gd name="adj" fmla="val 50000"/>
+            </a:avLst>
+          </a:prstGeom>
+          <a:solidFill>
+            <a:srgbClr val="10233F"/>
+          </a:solidFill>
+          <a:ln w="15240">
+            <a:solidFill>
+              <a:srgbClr val="1D3A5F"/>
+            </a:solidFill>
+            <a:prstDash val="solid"/>
+          </a:ln>
+        </p:spPr>
+      </p:sp>
+      <p:sp>
+        <p:nvSpPr>
+          <p:cNvPr id="14" name="Text 12"/>
+          <p:cNvSpPr/>
+          <p:nvPr/>
+        </p:nvSpPr>
+        <p:spPr>
+          <a:xfrm>
+            <a:off x="640080" y="4206240"/>
+            <a:ext cx="1221638" cy="402336"/>
+          </a:xfrm>
+          <a:prstGeom prst="rect">
+            <a:avLst/>
+          </a:prstGeom>
+          <a:noFill/>
+          <a:ln/>
+        </p:spPr>
+        <p:txBody>
+          <a:bodyPr wrap="square" lIns="0" tIns="0" rIns="0" bIns="0" rtlCol="0" anchor="ctr"/>
+          <a:lstStyle/>
+          <a:p>
+            <a:pPr algn="ctr" indent="0" marL="0">
+              <a:buNone/>
+            </a:pPr>
+            <a:r>
+              <a:rPr lang="en-US" sz="1250" dirty="0">
+                <a:solidFill>
+                  <a:srgbClr val="E8EEF7"/>
+                </a:solidFill>
+                <a:latin typeface="Calibri" pitchFamily="34" charset="0"/>
+                <a:ea typeface="Calibri" pitchFamily="34" charset="-122"/>
+                <a:cs typeface="Calibri" pitchFamily="34" charset="-120"/>
+              </a:rPr>
+              <a:t>v1 analisada</a:t>
+            </a:r>
+            <a:endParaRPr lang="en-US" sz="1250" dirty="0"/>
+          </a:p>
+        </p:txBody>
+      </p:sp>
+      <p:sp>
+        <p:nvSpPr>
+          <p:cNvPr id="15" name="Text 13"/>
+          <p:cNvSpPr/>
+          <p:nvPr/>
+        </p:nvSpPr>
+        <p:spPr>
+          <a:xfrm>
+            <a:off x="1898294" y="4206240"/>
+            <a:ext cx="274320" cy="402336"/>
+          </a:xfrm>
+          <a:prstGeom prst="rect">
+            <a:avLst/>
+          </a:prstGeom>
+          <a:noFill/>
+          <a:ln/>
+        </p:spPr>
+        <p:txBody>
+          <a:bodyPr wrap="square" lIns="0" tIns="0" rIns="0" bIns="0" rtlCol="0" anchor="ctr"/>
+          <a:lstStyle/>
+          <a:p>
+            <a:pPr algn="ctr" indent="0" marL="0">
+              <a:buNone/>
+            </a:pPr>
+            <a:r>
+              <a:rPr lang="en-US" sz="1500" b="1" dirty="0">
+                <a:solidFill>
+                  <a:srgbClr val="06B6D4"/>
+                </a:solidFill>
+                <a:latin typeface="Calibri" pitchFamily="34" charset="0"/>
+                <a:ea typeface="Calibri" pitchFamily="34" charset="-122"/>
+                <a:cs typeface="Calibri" pitchFamily="34" charset="-120"/>
+              </a:rPr>
+              <a:t>→</a:t>
+            </a:r>
+            <a:endParaRPr lang="en-US" sz="1500" dirty="0"/>
+          </a:p>
+        </p:txBody>
+      </p:sp>
+      <p:sp>
+        <p:nvSpPr>
+          <p:cNvPr id="16" name="Shape 14"/>
+          <p:cNvSpPr/>
+          <p:nvPr/>
+        </p:nvSpPr>
+        <p:spPr>
+          <a:xfrm>
+            <a:off x="2209190" y="4206240"/>
+            <a:ext cx="1060704" cy="402336"/>
+          </a:xfrm>
+          <a:prstGeom prst="roundRect">
+            <a:avLst>
+              <a:gd name="adj" fmla="val 50000"/>
+            </a:avLst>
+          </a:prstGeom>
+          <a:solidFill>
+            <a:srgbClr val="10233F"/>
+          </a:solidFill>
+          <a:ln w="15240">
+            <a:solidFill>
+              <a:srgbClr val="1D3A5F"/>
+            </a:solidFill>
+            <a:prstDash val="solid"/>
+          </a:ln>
+        </p:spPr>
+      </p:sp>
+      <p:sp>
+        <p:nvSpPr>
+          <p:cNvPr id="17" name="Text 15"/>
+          <p:cNvSpPr/>
+          <p:nvPr/>
+        </p:nvSpPr>
+        <p:spPr>
+          <a:xfrm>
+            <a:off x="2209190" y="4206240"/>
+            <a:ext cx="1060704" cy="402336"/>
+          </a:xfrm>
+          <a:prstGeom prst="rect">
+            <a:avLst/>
+          </a:prstGeom>
+          <a:noFill/>
+          <a:ln/>
+        </p:spPr>
+        <p:txBody>
+          <a:bodyPr wrap="square" lIns="0" tIns="0" rIns="0" bIns="0" rtlCol="0" anchor="ctr"/>
+          <a:lstStyle/>
+          <a:p>
+            <a:pPr algn="ctr" indent="0" marL="0">
+              <a:buNone/>
+            </a:pPr>
+            <a:r>
+              <a:rPr lang="en-US" sz="1250" dirty="0">
+                <a:solidFill>
+                  <a:srgbClr val="E8EEF7"/>
+                </a:solidFill>
+                <a:latin typeface="Calibri" pitchFamily="34" charset="0"/>
+                <a:ea typeface="Calibri" pitchFamily="34" charset="-122"/>
+                <a:cs typeface="Calibri" pitchFamily="34" charset="-120"/>
+              </a:rPr>
+              <a:t>MB corrige</a:t>
+            </a:r>
+            <a:endParaRPr lang="en-US" sz="1250" dirty="0"/>
+          </a:p>
+        </p:txBody>
+      </p:sp>
+      <p:sp>
+        <p:nvSpPr>
+          <p:cNvPr id="18" name="Text 16"/>
+          <p:cNvSpPr/>
+          <p:nvPr/>
+        </p:nvSpPr>
+        <p:spPr>
+          <a:xfrm>
+            <a:off x="3306470" y="4206240"/>
+            <a:ext cx="274320" cy="402336"/>
+          </a:xfrm>
+          <a:prstGeom prst="rect">
+            <a:avLst/>
+          </a:prstGeom>
+          <a:noFill/>
+          <a:ln/>
+        </p:spPr>
+        <p:txBody>
+          <a:bodyPr wrap="square" lIns="0" tIns="0" rIns="0" bIns="0" rtlCol="0" anchor="ctr"/>
+          <a:lstStyle/>
+          <a:p>
+            <a:pPr algn="ctr" indent="0" marL="0">
+              <a:buNone/>
+            </a:pPr>
+            <a:r>
+              <a:rPr lang="en-US" sz="1500" b="1" dirty="0">
+                <a:solidFill>
+                  <a:srgbClr val="06B6D4"/>
+                </a:solidFill>
+                <a:latin typeface="Calibri" pitchFamily="34" charset="0"/>
+                <a:ea typeface="Calibri" pitchFamily="34" charset="-122"/>
+                <a:cs typeface="Calibri" pitchFamily="34" charset="-120"/>
+              </a:rPr>
+              <a:t>→</a:t>
+            </a:r>
+            <a:endParaRPr lang="en-US" sz="1500" dirty="0"/>
+          </a:p>
+        </p:txBody>
+      </p:sp>
+      <p:sp>
+        <p:nvSpPr>
+          <p:cNvPr id="19" name="Shape 17"/>
+          <p:cNvSpPr/>
+          <p:nvPr/>
+        </p:nvSpPr>
+        <p:spPr>
+          <a:xfrm>
+            <a:off x="3617366" y="4206240"/>
+            <a:ext cx="1704442" cy="402336"/>
+          </a:xfrm>
+          <a:prstGeom prst="roundRect">
+            <a:avLst>
+              <a:gd name="adj" fmla="val 50000"/>
+            </a:avLst>
+          </a:prstGeom>
+          <a:solidFill>
+            <a:srgbClr val="10233F"/>
+          </a:solidFill>
+          <a:ln w="15240">
+            <a:solidFill>
+              <a:srgbClr val="1D3A5F"/>
+            </a:solidFill>
+            <a:prstDash val="solid"/>
+          </a:ln>
+        </p:spPr>
+      </p:sp>
+      <p:sp>
+        <p:nvSpPr>
+          <p:cNvPr id="20" name="Text 18"/>
+          <p:cNvSpPr/>
+          <p:nvPr/>
+        </p:nvSpPr>
+        <p:spPr>
+          <a:xfrm>
+            <a:off x="3617366" y="4206240"/>
+            <a:ext cx="1704442" cy="402336"/>
+          </a:xfrm>
+          <a:prstGeom prst="rect">
+            <a:avLst/>
+          </a:prstGeom>
+          <a:noFill/>
+          <a:ln/>
+        </p:spPr>
+        <p:txBody>
+          <a:bodyPr wrap="square" lIns="0" tIns="0" rIns="0" bIns="0" rtlCol="0" anchor="ctr"/>
+          <a:lstStyle/>
+          <a:p>
+            <a:pPr algn="ctr" indent="0" marL="0">
+              <a:buNone/>
+            </a:pPr>
+            <a:r>
+              <a:rPr lang="en-US" sz="1250" dirty="0">
+                <a:solidFill>
+                  <a:srgbClr val="E8EEF7"/>
+                </a:solidFill>
+                <a:latin typeface="Calibri" pitchFamily="34" charset="0"/>
+                <a:ea typeface="Calibri" pitchFamily="34" charset="-122"/>
+                <a:cs typeface="Calibri" pitchFamily="34" charset="-120"/>
+              </a:rPr>
+              <a:t>v2 disponibilizada</a:t>
+            </a:r>
+            <a:endParaRPr lang="en-US" sz="1250" dirty="0"/>
+          </a:p>
+        </p:txBody>
+      </p:sp>
+      <p:sp>
+        <p:nvSpPr>
+          <p:cNvPr id="21" name="Text 19"/>
+          <p:cNvSpPr/>
+          <p:nvPr/>
+        </p:nvSpPr>
+        <p:spPr>
+          <a:xfrm>
+            <a:off x="5358384" y="4206240"/>
+            <a:ext cx="274320" cy="402336"/>
+          </a:xfrm>
+          <a:prstGeom prst="rect">
+            <a:avLst/>
+          </a:prstGeom>
+          <a:noFill/>
+          <a:ln/>
+        </p:spPr>
+        <p:txBody>
+          <a:bodyPr wrap="square" lIns="0" tIns="0" rIns="0" bIns="0" rtlCol="0" anchor="ctr"/>
+          <a:lstStyle/>
+          <a:p>
+            <a:pPr algn="ctr" indent="0" marL="0">
+              <a:buNone/>
+            </a:pPr>
+            <a:r>
+              <a:rPr lang="en-US" sz="1500" b="1" dirty="0">
+                <a:solidFill>
+                  <a:srgbClr val="06B6D4"/>
+                </a:solidFill>
+                <a:latin typeface="Calibri" pitchFamily="34" charset="0"/>
+                <a:ea typeface="Calibri" pitchFamily="34" charset="-122"/>
+                <a:cs typeface="Calibri" pitchFamily="34" charset="-120"/>
+              </a:rPr>
+              <a:t>→</a:t>
+            </a:r>
+            <a:endParaRPr lang="en-US" sz="1500" dirty="0"/>
+          </a:p>
+        </p:txBody>
+      </p:sp>
+      <p:sp>
+        <p:nvSpPr>
+          <p:cNvPr id="22" name="Shape 20"/>
+          <p:cNvSpPr/>
+          <p:nvPr/>
+        </p:nvSpPr>
+        <p:spPr>
+          <a:xfrm>
+            <a:off x="5669280" y="4206240"/>
+            <a:ext cx="1463040" cy="402336"/>
+          </a:xfrm>
+          <a:prstGeom prst="roundRect">
+            <a:avLst>
+              <a:gd name="adj" fmla="val 50000"/>
+            </a:avLst>
+          </a:prstGeom>
+          <a:solidFill>
+            <a:srgbClr val="10233F"/>
+          </a:solidFill>
+          <a:ln w="15240">
+            <a:solidFill>
+              <a:srgbClr val="34D399"/>
+            </a:solidFill>
+            <a:prstDash val="solid"/>
+          </a:ln>
+        </p:spPr>
+      </p:sp>
+      <p:sp>
+        <p:nvSpPr>
+          <p:cNvPr id="23" name="Text 21"/>
+          <p:cNvSpPr/>
+          <p:nvPr/>
+        </p:nvSpPr>
+        <p:spPr>
+          <a:xfrm>
+            <a:off x="5669280" y="4206240"/>
+            <a:ext cx="1463040" cy="402336"/>
+          </a:xfrm>
+          <a:prstGeom prst="rect">
+            <a:avLst/>
+          </a:prstGeom>
+          <a:noFill/>
+          <a:ln/>
+        </p:spPr>
+        <p:txBody>
+          <a:bodyPr wrap="square" lIns="0" tIns="0" rIns="0" bIns="0" rtlCol="0" anchor="ctr"/>
+          <a:lstStyle/>
+          <a:p>
+            <a:pPr algn="ctr" indent="0" marL="0">
+              <a:buNone/>
+            </a:pPr>
+            <a:r>
+              <a:rPr lang="en-US" sz="1250" b="1" dirty="0">
+                <a:solidFill>
+                  <a:srgbClr val="34D399"/>
+                </a:solidFill>
+                <a:latin typeface="Calibri" pitchFamily="34" charset="0"/>
+                <a:ea typeface="Calibri" pitchFamily="34" charset="-122"/>
+                <a:cs typeface="Calibri" pitchFamily="34" charset="-120"/>
+              </a:rPr>
+              <a:t>Formador aprova</a:t>
+            </a:r>
+            <a:endParaRPr lang="en-US" sz="1250" dirty="0"/>
+          </a:p>
+        </p:txBody>
+      </p:sp>
+      <p:sp>
+        <p:nvSpPr>
+          <p:cNvPr id="24" name="Shape 22"/>
+          <p:cNvSpPr/>
+          <p:nvPr/>
+        </p:nvSpPr>
+        <p:spPr>
+          <a:xfrm>
+            <a:off x="640080" y="4937760"/>
+            <a:ext cx="10972800" cy="1188720"/>
+          </a:xfrm>
+          <a:prstGeom prst="roundRect">
+            <a:avLst>
+              <a:gd name="adj" fmla="val 6923"/>
             </a:avLst>
           </a:prstGeom>
           <a:solidFill>
@@ -6764,14 +9502,14 @@
       </p:sp>
       <p:sp>
         <p:nvSpPr>
-          <p:cNvPr id="5" name="Text 3"/>
-          <p:cNvSpPr/>
-          <p:nvPr/>
-        </p:nvSpPr>
-        <p:spPr>
-          <a:xfrm>
-            <a:off x="841248" y="1792224"/>
-            <a:ext cx="10479024" cy="329184"/>
+          <p:cNvPr id="25" name="Text 23"/>
+          <p:cNvSpPr/>
+          <p:nvPr/>
+        </p:nvSpPr>
+        <p:spPr>
+          <a:xfrm>
+            <a:off x="841248" y="5084064"/>
+            <a:ext cx="10570464" cy="329184"/>
           </a:xfrm>
           <a:prstGeom prst="rect">
             <a:avLst/>
@@ -6795,7 +9533,7 @@
                 <a:ea typeface="Calibri" pitchFamily="34" charset="-122"/>
                 <a:cs typeface="Calibri" pitchFamily="34" charset="-120"/>
               </a:rPr>
-              <a:t>O botão "Baixar todos" não aparece</a:t>
+              <a:t>Histórico completo</a:t>
             </a:r>
             <a:endParaRPr lang="en-US" sz="1400" dirty="0"/>
           </a:p>
@@ -6803,14 +9541,14 @@
       </p:sp>
       <p:sp>
         <p:nvSpPr>
-          <p:cNvPr id="6" name="Text 4"/>
-          <p:cNvSpPr/>
-          <p:nvPr/>
-        </p:nvSpPr>
-        <p:spPr>
-          <a:xfrm>
-            <a:off x="841248" y="2121408"/>
-            <a:ext cx="10479024" cy="310896"/>
+          <p:cNvPr id="26" name="Text 24"/>
+          <p:cNvSpPr/>
+          <p:nvPr/>
+        </p:nvSpPr>
+        <p:spPr>
+          <a:xfrm>
+            <a:off x="841248" y="5413248"/>
+            <a:ext cx="10570464" cy="585216"/>
           </a:xfrm>
           <a:prstGeom prst="rect">
             <a:avLst/>
@@ -6837,7 +9575,7 @@
                 <a:ea typeface="Calibri" pitchFamily="34" charset="-122"/>
                 <a:cs typeface="Calibri" pitchFamily="34" charset="-120"/>
               </a:rPr>
-              <a:t>O curso ainda não tem arquivos enviados — em geral ele só chega à MB depois dos envios do formador.</a:t>
+              <a:t>Todas as versões e seus apontamentos ficam guardados. A lista "Comparar versão" permite rever qualquer versão anterior.</a:t>
             </a:r>
             <a:endParaRPr lang="en-US" sz="1300" dirty="0"/>
           </a:p>
@@ -6845,276 +9583,7 @@
       </p:sp>
       <p:sp>
         <p:nvSpPr>
-          <p:cNvPr id="7" name="Shape 5"/>
-          <p:cNvSpPr/>
-          <p:nvPr/>
-        </p:nvSpPr>
-        <p:spPr>
-          <a:xfrm>
-            <a:off x="640080" y="2706624"/>
-            <a:ext cx="10881360" cy="914400"/>
-          </a:xfrm>
-          <a:prstGeom prst="roundRect">
-            <a:avLst>
-              <a:gd name="adj" fmla="val 9000"/>
-            </a:avLst>
-          </a:prstGeom>
-          <a:solidFill>
-            <a:srgbClr val="10233F"/>
-          </a:solidFill>
-          <a:ln w="12700">
-            <a:solidFill>
-              <a:srgbClr val="1D3A5F"/>
-            </a:solidFill>
-            <a:prstDash val="solid"/>
-          </a:ln>
-        </p:spPr>
-      </p:sp>
-      <p:sp>
-        <p:nvSpPr>
-          <p:cNvPr id="8" name="Text 6"/>
-          <p:cNvSpPr/>
-          <p:nvPr/>
-        </p:nvSpPr>
-        <p:spPr>
-          <a:xfrm>
-            <a:off x="841248" y="2852928"/>
-            <a:ext cx="10479024" cy="329184"/>
-          </a:xfrm>
-          <a:prstGeom prst="rect">
-            <a:avLst/>
-          </a:prstGeom>
-          <a:noFill/>
-          <a:ln/>
-        </p:spPr>
-        <p:txBody>
-          <a:bodyPr wrap="square" lIns="0" tIns="0" rIns="0" bIns="0" rtlCol="0" anchor="ctr"/>
-          <a:lstStyle/>
-          <a:p>
-            <a:pPr indent="0" marL="0">
-              <a:buNone/>
-            </a:pPr>
-            <a:r>
-              <a:rPr lang="en-US" sz="1400" b="1" dirty="0">
-                <a:solidFill>
-                  <a:srgbClr val="22D3EE"/>
-                </a:solidFill>
-                <a:latin typeface="Calibri" pitchFamily="34" charset="0"/>
-                <a:ea typeface="Calibri" pitchFamily="34" charset="-122"/>
-                <a:cs typeface="Calibri" pitchFamily="34" charset="-120"/>
-              </a:rPr>
-              <a:t>Não consigo mover o status</a:t>
-            </a:r>
-            <a:endParaRPr lang="en-US" sz="1400" dirty="0"/>
-          </a:p>
-        </p:txBody>
-      </p:sp>
-      <p:sp>
-        <p:nvSpPr>
-          <p:cNvPr id="9" name="Text 7"/>
-          <p:cNvSpPr/>
-          <p:nvPr/>
-        </p:nvSpPr>
-        <p:spPr>
-          <a:xfrm>
-            <a:off x="841248" y="3182112"/>
-            <a:ext cx="10479024" cy="310896"/>
-          </a:xfrm>
-          <a:prstGeom prst="rect">
-            <a:avLst/>
-          </a:prstGeom>
-          <a:noFill/>
-          <a:ln/>
-        </p:spPr>
-        <p:txBody>
-          <a:bodyPr wrap="square" lIns="0" tIns="0" rIns="0" bIns="0" rtlCol="0" anchor="t"/>
-          <a:lstStyle/>
-          <a:p>
-            <a:pPr indent="0" marL="0">
-              <a:lnSpc>
-                <a:spcPct val="112000"/>
-              </a:lnSpc>
-              <a:buNone/>
-            </a:pPr>
-            <a:r>
-              <a:rPr lang="en-US" sz="1300" dirty="0">
-                <a:solidFill>
-                  <a:srgbClr val="E8EEF7"/>
-                </a:solidFill>
-                <a:latin typeface="Calibri" pitchFamily="34" charset="0"/>
-                <a:ea typeface="Calibri" pitchFamily="34" charset="-122"/>
-                <a:cs typeface="Calibri" pitchFamily="34" charset="-120"/>
-              </a:rPr>
-              <a:t>A MB move apenas nas suas 3 transições. Se o curso está em outra fase, a ação é de outra equipe.</a:t>
-            </a:r>
-            <a:endParaRPr lang="en-US" sz="1300" dirty="0"/>
-          </a:p>
-        </p:txBody>
-      </p:sp>
-      <p:sp>
-        <p:nvSpPr>
-          <p:cNvPr id="10" name="Shape 8"/>
-          <p:cNvSpPr/>
-          <p:nvPr/>
-        </p:nvSpPr>
-        <p:spPr>
-          <a:xfrm>
-            <a:off x="640080" y="3767328"/>
-            <a:ext cx="10881360" cy="914400"/>
-          </a:xfrm>
-          <a:prstGeom prst="roundRect">
-            <a:avLst>
-              <a:gd name="adj" fmla="val 9000"/>
-            </a:avLst>
-          </a:prstGeom>
-          <a:solidFill>
-            <a:srgbClr val="10233F"/>
-          </a:solidFill>
-          <a:ln w="12700">
-            <a:solidFill>
-              <a:srgbClr val="1D3A5F"/>
-            </a:solidFill>
-            <a:prstDash val="solid"/>
-          </a:ln>
-        </p:spPr>
-      </p:sp>
-      <p:sp>
-        <p:nvSpPr>
-          <p:cNvPr id="11" name="Text 9"/>
-          <p:cNvSpPr/>
-          <p:nvPr/>
-        </p:nvSpPr>
-        <p:spPr>
-          <a:xfrm>
-            <a:off x="841248" y="3913632"/>
-            <a:ext cx="10479024" cy="329184"/>
-          </a:xfrm>
-          <a:prstGeom prst="rect">
-            <a:avLst/>
-          </a:prstGeom>
-          <a:noFill/>
-          <a:ln/>
-        </p:spPr>
-        <p:txBody>
-          <a:bodyPr wrap="square" lIns="0" tIns="0" rIns="0" bIns="0" rtlCol="0" anchor="ctr"/>
-          <a:lstStyle/>
-          <a:p>
-            <a:pPr indent="0" marL="0">
-              <a:buNone/>
-            </a:pPr>
-            <a:r>
-              <a:rPr lang="en-US" sz="1400" b="1" dirty="0">
-                <a:solidFill>
-                  <a:srgbClr val="22D3EE"/>
-                </a:solidFill>
-                <a:latin typeface="Calibri" pitchFamily="34" charset="0"/>
-                <a:ea typeface="Calibri" pitchFamily="34" charset="-122"/>
-                <a:cs typeface="Calibri" pitchFamily="34" charset="-120"/>
-              </a:rPr>
-              <a:t>Esqueci a senha</a:t>
-            </a:r>
-            <a:endParaRPr lang="en-US" sz="1400" dirty="0"/>
-          </a:p>
-        </p:txBody>
-      </p:sp>
-      <p:sp>
-        <p:nvSpPr>
-          <p:cNvPr id="12" name="Text 10"/>
-          <p:cNvSpPr/>
-          <p:nvPr/>
-        </p:nvSpPr>
-        <p:spPr>
-          <a:xfrm>
-            <a:off x="841248" y="4242816"/>
-            <a:ext cx="10479024" cy="310896"/>
-          </a:xfrm>
-          <a:prstGeom prst="rect">
-            <a:avLst/>
-          </a:prstGeom>
-          <a:noFill/>
-          <a:ln/>
-        </p:spPr>
-        <p:txBody>
-          <a:bodyPr wrap="square" lIns="0" tIns="0" rIns="0" bIns="0" rtlCol="0" anchor="t"/>
-          <a:lstStyle/>
-          <a:p>
-            <a:pPr indent="0" marL="0">
-              <a:lnSpc>
-                <a:spcPct val="112000"/>
-              </a:lnSpc>
-              <a:buNone/>
-            </a:pPr>
-            <a:r>
-              <a:rPr lang="en-US" sz="1300" dirty="0">
-                <a:solidFill>
-                  <a:srgbClr val="E8EEF7"/>
-                </a:solidFill>
-                <a:latin typeface="Calibri" pitchFamily="34" charset="0"/>
-                <a:ea typeface="Calibri" pitchFamily="34" charset="-122"/>
-                <a:cs typeface="Calibri" pitchFamily="34" charset="-120"/>
-              </a:rPr>
-              <a:t>Escreva para ti.cecape@scseduca.com.br pedindo a redefinição.</a:t>
-            </a:r>
-            <a:endParaRPr lang="en-US" sz="1300" dirty="0"/>
-          </a:p>
-        </p:txBody>
-      </p:sp>
-      <p:sp>
-        <p:nvSpPr>
-          <p:cNvPr id="13" name="Text 11"/>
-          <p:cNvSpPr/>
-          <p:nvPr/>
-        </p:nvSpPr>
-        <p:spPr>
-          <a:xfrm>
-            <a:off x="640080" y="5943600"/>
-            <a:ext cx="10058400" cy="365760"/>
-          </a:xfrm>
-          <a:prstGeom prst="rect">
-            <a:avLst/>
-          </a:prstGeom>
-          <a:noFill/>
-          <a:ln/>
-        </p:spPr>
-        <p:txBody>
-          <a:bodyPr wrap="square" lIns="0" tIns="0" rIns="0" bIns="0" rtlCol="0" anchor="ctr"/>
-          <a:lstStyle/>
-          <a:p>
-            <a:pPr indent="0" marL="0">
-              <a:buNone/>
-            </a:pPr>
-            <a:r>
-              <a:rPr lang="en-US" sz="1600" dirty="0">
-                <a:solidFill>
-                  <a:srgbClr val="8BAAC8"/>
-                </a:solidFill>
-                <a:latin typeface="Calibri" pitchFamily="34" charset="0"/>
-                <a:ea typeface="Calibri" pitchFamily="34" charset="-122"/>
-                <a:cs typeface="Calibri" pitchFamily="34" charset="-120"/>
-              </a:rPr>
-              <a:t>Equipe de TI do CECAPE  •  </a:t>
-            </a:r>
-            <a:pPr indent="0" marL="0">
-              <a:buNone/>
-            </a:pPr>
-            <a:r>
-              <a:rPr lang="en-US" sz="1600" b="1" dirty="0">
-                <a:solidFill>
-                  <a:srgbClr val="22D3EE"/>
-                </a:solidFill>
-                <a:latin typeface="Calibri" pitchFamily="34" charset="0"/>
-                <a:ea typeface="Calibri" pitchFamily="34" charset="-122"/>
-                <a:cs typeface="Calibri" pitchFamily="34" charset="-120"/>
-              </a:rPr>
-              <a:t>ti.cecape@scseduca.com.br</a:t>
-            </a:r>
-            <a:endParaRPr lang="en-US" sz="1600" dirty="0"/>
-          </a:p>
-        </p:txBody>
-      </p:sp>
-      <p:sp>
-        <p:nvSpPr>
-          <p:cNvPr id="14" name="Text 12"/>
+          <p:cNvPr id="27" name="Text 25"/>
           <p:cNvSpPr/>
           <p:nvPr/>
         </p:nvSpPr>
@@ -7153,7 +9622,7 @@
       </p:sp>
       <p:sp>
         <p:nvSpPr>
-          <p:cNvPr id="15" name="Text 13"/>
+          <p:cNvPr id="28" name="Text 26"/>
           <p:cNvSpPr/>
           <p:nvPr/>
         </p:nvSpPr>
@@ -7184,7 +9653,7 @@
                 <a:ea typeface="Calibri" pitchFamily="34" charset="-122"/>
                 <a:cs typeface="Calibri" pitchFamily="34" charset="-120"/>
               </a:rPr>
-              <a:t>9 / 9</a:t>
+              <a:t>9 / 11</a:t>
             </a:r>
             <a:endParaRPr lang="en-US" sz="950" dirty="0"/>
           </a:p>

--- a/docs/tutoriais/Tutorial-MB.pptx
+++ b/docs/tutoriais/Tutorial-MB.pptx
@@ -2823,12 +2823,12 @@
         </p:nvSpPr>
         <p:spPr>
           <a:xfrm>
-            <a:off x="640080" y="1691640"/>
-            <a:ext cx="10881360" cy="1234440"/>
+            <a:off x="640080" y="1645920"/>
+            <a:ext cx="10881360" cy="1188720"/>
           </a:xfrm>
           <a:prstGeom prst="roundRect">
             <a:avLst>
-              <a:gd name="adj" fmla="val 6667"/>
+              <a:gd name="adj" fmla="val 6923"/>
             </a:avLst>
           </a:prstGeom>
           <a:solidFill>
@@ -2850,7 +2850,7 @@
         </p:nvSpPr>
         <p:spPr>
           <a:xfrm>
-            <a:off x="841248" y="1837944"/>
+            <a:off x="841248" y="1792224"/>
             <a:ext cx="10479024" cy="329184"/>
           </a:xfrm>
           <a:prstGeom prst="rect">
@@ -2889,8 +2889,8 @@
         </p:nvSpPr>
         <p:spPr>
           <a:xfrm>
-            <a:off x="841248" y="2167128"/>
-            <a:ext cx="10479024" cy="630936"/>
+            <a:off x="841248" y="2121408"/>
+            <a:ext cx="10479024" cy="585216"/>
           </a:xfrm>
           <a:prstGeom prst="rect">
             <a:avLst/>
@@ -2909,7 +2909,7 @@
               <a:buNone/>
             </a:pPr>
             <a:r>
-              <a:rPr lang="en-US" sz="1300" dirty="0">
+              <a:rPr lang="en-US" sz="1250" dirty="0">
                 <a:solidFill>
                   <a:srgbClr val="E8EEF7"/>
                 </a:solidFill>
@@ -2919,7 +2919,7 @@
               </a:rPr>
               <a:t>Confirme que o vídeo aparece na lista de 🎬 Vídeos. Se aparecer, o e-mail foi disparado — peça que confira o spam.</a:t>
             </a:r>
-            <a:endParaRPr lang="en-US" sz="1300" dirty="0"/>
+            <a:endParaRPr lang="en-US" sz="1250" dirty="0"/>
           </a:p>
         </p:txBody>
       </p:sp>
@@ -2931,12 +2931,12 @@
         </p:nvSpPr>
         <p:spPr>
           <a:xfrm>
-            <a:off x="640080" y="3108960"/>
-            <a:ext cx="10881360" cy="1234440"/>
+            <a:off x="640080" y="3017520"/>
+            <a:ext cx="10881360" cy="1188720"/>
           </a:xfrm>
           <a:prstGeom prst="roundRect">
             <a:avLst>
-              <a:gd name="adj" fmla="val 6667"/>
+              <a:gd name="adj" fmla="val 6923"/>
             </a:avLst>
           </a:prstGeom>
           <a:solidFill>
@@ -2958,7 +2958,7 @@
         </p:nvSpPr>
         <p:spPr>
           <a:xfrm>
-            <a:off x="841248" y="3255264"/>
+            <a:off x="841248" y="3163824"/>
             <a:ext cx="10479024" cy="329184"/>
           </a:xfrm>
           <a:prstGeom prst="rect">
@@ -2997,8 +2997,8 @@
         </p:nvSpPr>
         <p:spPr>
           <a:xfrm>
-            <a:off x="841248" y="3584448"/>
-            <a:ext cx="10479024" cy="630936"/>
+            <a:off x="841248" y="3493008"/>
+            <a:ext cx="10479024" cy="585216"/>
           </a:xfrm>
           <a:prstGeom prst="rect">
             <a:avLst/>
@@ -3017,7 +3017,7 @@
               <a:buNone/>
             </a:pPr>
             <a:r>
-              <a:rPr lang="en-US" sz="1300" dirty="0">
+              <a:rPr lang="en-US" sz="1250" dirty="0">
                 <a:solidFill>
                   <a:srgbClr val="E8EEF7"/>
                 </a:solidFill>
@@ -3027,7 +3027,7 @@
               </a:rPr>
               <a:t>O curso ainda não tem materiais enviados pelo formador.</a:t>
             </a:r>
-            <a:endParaRPr lang="en-US" sz="1300" dirty="0"/>
+            <a:endParaRPr lang="en-US" sz="1250" dirty="0"/>
           </a:p>
         </p:txBody>
       </p:sp>
@@ -3039,12 +3039,12 @@
         </p:nvSpPr>
         <p:spPr>
           <a:xfrm>
-            <a:off x="640080" y="4526280"/>
-            <a:ext cx="10881360" cy="1234440"/>
+            <a:off x="640080" y="4389120"/>
+            <a:ext cx="10881360" cy="1188720"/>
           </a:xfrm>
           <a:prstGeom prst="roundRect">
             <a:avLst>
-              <a:gd name="adj" fmla="val 6667"/>
+              <a:gd name="adj" fmla="val 6923"/>
             </a:avLst>
           </a:prstGeom>
           <a:solidFill>
@@ -3066,7 +3066,7 @@
         </p:nvSpPr>
         <p:spPr>
           <a:xfrm>
-            <a:off x="841248" y="4672584"/>
+            <a:off x="841248" y="4535424"/>
             <a:ext cx="10479024" cy="329184"/>
           </a:xfrm>
           <a:prstGeom prst="rect">
@@ -3105,8 +3105,8 @@
         </p:nvSpPr>
         <p:spPr>
           <a:xfrm>
-            <a:off x="841248" y="5001768"/>
-            <a:ext cx="10479024" cy="630936"/>
+            <a:off x="841248" y="4864608"/>
+            <a:ext cx="10479024" cy="585216"/>
           </a:xfrm>
           <a:prstGeom prst="rect">
             <a:avLst/>
@@ -3125,7 +3125,7 @@
               <a:buNone/>
             </a:pPr>
             <a:r>
-              <a:rPr lang="en-US" sz="1300" dirty="0">
+              <a:rPr lang="en-US" sz="1250" dirty="0">
                 <a:solidFill>
                   <a:srgbClr val="E8EEF7"/>
                 </a:solidFill>
@@ -3135,7 +3135,7 @@
               </a:rPr>
               <a:t>A MB move apenas nas suas 3 transições. Em outra fase, a ação é de outra equipe.</a:t>
             </a:r>
-            <a:endParaRPr lang="en-US" sz="1300" dirty="0"/>
+            <a:endParaRPr lang="en-US" sz="1250" dirty="0"/>
           </a:p>
         </p:txBody>
       </p:sp>
@@ -3147,24 +3147,24 @@
         </p:nvSpPr>
         <p:spPr>
           <a:xfrm>
-            <a:off x="640080" y="5943600"/>
-            <a:ext cx="10058400" cy="365760"/>
-          </a:xfrm>
-          <a:prstGeom prst="rect">
-            <a:avLst/>
-          </a:prstGeom>
-          <a:noFill/>
-          <a:ln/>
-        </p:spPr>
-        <p:txBody>
-          <a:bodyPr wrap="square" lIns="0" tIns="0" rIns="0" bIns="0" rtlCol="0" anchor="ctr"/>
-          <a:lstStyle/>
-          <a:p>
-            <a:pPr indent="0" marL="0">
-              <a:buNone/>
-            </a:pPr>
-            <a:r>
-              <a:rPr lang="en-US" sz="1600" dirty="0">
+            <a:off x="640080" y="5989320"/>
+            <a:ext cx="10058400" cy="347472"/>
+          </a:xfrm>
+          <a:prstGeom prst="rect">
+            <a:avLst/>
+          </a:prstGeom>
+          <a:noFill/>
+          <a:ln/>
+        </p:spPr>
+        <p:txBody>
+          <a:bodyPr wrap="square" lIns="0" tIns="0" rIns="0" bIns="0" rtlCol="0" anchor="ctr"/>
+          <a:lstStyle/>
+          <a:p>
+            <a:pPr indent="0" marL="0">
+              <a:buNone/>
+            </a:pPr>
+            <a:r>
+              <a:rPr lang="en-US" sz="1500" dirty="0">
                 <a:solidFill>
                   <a:srgbClr val="8BAAC8"/>
                 </a:solidFill>
@@ -3178,7 +3178,7 @@
               <a:buNone/>
             </a:pPr>
             <a:r>
-              <a:rPr lang="en-US" sz="1600" b="1" dirty="0">
+              <a:rPr lang="en-US" sz="1500" b="1" dirty="0">
                 <a:solidFill>
                   <a:srgbClr val="22D3EE"/>
                 </a:solidFill>
@@ -3188,7 +3188,7 @@
               </a:rPr>
               <a:t>ti.cecape@scseduca.com.br</a:t>
             </a:r>
-            <a:endParaRPr lang="en-US" sz="1600" dirty="0"/>
+            <a:endParaRPr lang="en-US" sz="1500" dirty="0"/>
           </a:p>
         </p:txBody>
       </p:sp>
@@ -7927,12 +7927,12 @@
         </p:nvSpPr>
         <p:spPr>
           <a:xfrm>
-            <a:off x="7574520" y="1737360"/>
-            <a:ext cx="3138960" cy="4480560"/>
+            <a:off x="7612654" y="1737360"/>
+            <a:ext cx="3062693" cy="4480560"/>
           </a:xfrm>
           <a:prstGeom prst="roundRect">
             <a:avLst>
-              <a:gd name="adj" fmla="val 2622"/>
+              <a:gd name="adj" fmla="val 2687"/>
             </a:avLst>
           </a:prstGeom>
           <a:solidFill>
@@ -7962,8 +7962,8 @@
         </p:blipFill>
         <p:spPr>
           <a:xfrm>
-            <a:off x="7684248" y="1847088"/>
-            <a:ext cx="2919504" cy="4261104"/>
+            <a:off x="7722382" y="1847088"/>
+            <a:ext cx="2843237" cy="4261104"/>
           </a:xfrm>
           <a:prstGeom prst="rect">
             <a:avLst/>
